--- a/說明用工具/張允豪 購物網站 專題 ver.0.5.pptx
+++ b/說明用工具/張允豪 購物網站 專題 ver.0.5.pptx
@@ -25,6 +25,7 @@
     <p:sldId id="269" r:id="rId19"/>
     <p:sldId id="290" r:id="rId20"/>
     <p:sldId id="270" r:id="rId21"/>
+    <p:sldId id="291" r:id="rId22"/>
   </p:sldIdLst>
   <p:sldSz cx="14630400" cy="8229600"/>
   <p:notesSz cx="6858000" cy="9144000"/>
@@ -6485,7 +6486,7 @@
         </p:nvSpPr>
         <p:spPr>
           <a:xfrm>
-            <a:off x="837724" y="2467928"/>
+            <a:off x="5828366" y="1590544"/>
             <a:ext cx="5632490" cy="704017"/>
           </a:xfrm>
           <a:prstGeom prst="rect">
@@ -6505,12 +6506,12 @@
               <a:buNone/>
             </a:pPr>
             <a:r>
-              <a:rPr lang="en-US" sz="4400" dirty="0">
+              <a:rPr lang="en-US" sz="4400" dirty="0" err="1">
                 <a:latin typeface="Unbounded" pitchFamily="34" charset="0"/>
                 <a:ea typeface="Unbounded" pitchFamily="34" charset="-122"/>
                 <a:cs typeface="Unbounded" pitchFamily="34" charset="-120"/>
               </a:rPr>
-              <a:t>技術總結與未來展望</a:t>
+              <a:t>未來展望</a:t>
             </a:r>
             <a:endParaRPr lang="en-US" sz="4400" dirty="0"/>
           </a:p>
@@ -6518,10 +6519,10 @@
       </p:sp>
       <p:sp>
         <p:nvSpPr>
-          <p:cNvPr id="3" name="Text 1">
-            <a:extLst>
-              <a:ext uri="{FF2B5EF4-FFF2-40B4-BE49-F238E27FC236}">
-                <a16:creationId xmlns:a16="http://schemas.microsoft.com/office/drawing/2014/main" id="{E8FEE2E1-1E85-EEEE-7325-2D108C73AF3D}"/>
+          <p:cNvPr id="7" name="Text 5">
+            <a:extLst>
+              <a:ext uri="{FF2B5EF4-FFF2-40B4-BE49-F238E27FC236}">
+                <a16:creationId xmlns:a16="http://schemas.microsoft.com/office/drawing/2014/main" id="{86BEF0FC-6390-1497-F4EC-574402A2FE09}"/>
               </a:ext>
             </a:extLst>
           </p:cNvPr>
@@ -6530,7 +6531,7 @@
         </p:nvSpPr>
         <p:spPr>
           <a:xfrm>
-            <a:off x="837724" y="3770233"/>
+            <a:off x="5907147" y="3439727"/>
             <a:ext cx="2816185" cy="351949"/>
           </a:xfrm>
           <a:prstGeom prst="rect">
@@ -6555,7 +6556,7 @@
                 <a:ea typeface="Unbounded" pitchFamily="34" charset="-122"/>
                 <a:cs typeface="Unbounded" pitchFamily="34" charset="-120"/>
               </a:rPr>
-              <a:t>技術棧優勢</a:t>
+              <a:t>未來功能擴展</a:t>
             </a:r>
             <a:endParaRPr lang="en-US" sz="2200" dirty="0"/>
           </a:p>
@@ -6563,10 +6564,10 @@
       </p:sp>
       <p:sp>
         <p:nvSpPr>
-          <p:cNvPr id="4" name="Text 2">
-            <a:extLst>
-              <a:ext uri="{FF2B5EF4-FFF2-40B4-BE49-F238E27FC236}">
-                <a16:creationId xmlns:a16="http://schemas.microsoft.com/office/drawing/2014/main" id="{71C51FCE-3E66-78F1-6A11-6A5C36BF09F3}"/>
+          <p:cNvPr id="8" name="Text 6">
+            <a:extLst>
+              <a:ext uri="{FF2B5EF4-FFF2-40B4-BE49-F238E27FC236}">
+                <a16:creationId xmlns:a16="http://schemas.microsoft.com/office/drawing/2014/main" id="{80252D43-CF65-35D9-E01C-9E4F536F7CC7}"/>
               </a:ext>
             </a:extLst>
           </p:cNvPr>
@@ -6575,7 +6576,7 @@
         </p:nvSpPr>
         <p:spPr>
           <a:xfrm>
-            <a:off x="837724" y="4361498"/>
+            <a:off x="5907147" y="4030992"/>
             <a:ext cx="6185535" cy="383024"/>
           </a:xfrm>
           <a:prstGeom prst="rect">
@@ -6601,7 +6602,7 @@
                 <a:ea typeface="Cabin" pitchFamily="34" charset="-122"/>
                 <a:cs typeface="Cabin" pitchFamily="34" charset="-120"/>
               </a:rPr>
-              <a:t>React 靈活前端</a:t>
+              <a:t>整合真實物流與支付</a:t>
             </a:r>
             <a:endParaRPr lang="en-US" sz="1850" dirty="0"/>
           </a:p>
@@ -6609,10 +6610,10 @@
       </p:sp>
       <p:sp>
         <p:nvSpPr>
-          <p:cNvPr id="5" name="Text 3">
-            <a:extLst>
-              <a:ext uri="{FF2B5EF4-FFF2-40B4-BE49-F238E27FC236}">
-                <a16:creationId xmlns:a16="http://schemas.microsoft.com/office/drawing/2014/main" id="{A40FCDB0-C86F-254E-A3E2-9DCE2297BBA6}"/>
+          <p:cNvPr id="10" name="Text 8">
+            <a:extLst>
+              <a:ext uri="{FF2B5EF4-FFF2-40B4-BE49-F238E27FC236}">
+                <a16:creationId xmlns:a16="http://schemas.microsoft.com/office/drawing/2014/main" id="{D611A246-5FF8-10E3-B3D6-9B1DA498610E}"/>
               </a:ext>
             </a:extLst>
           </p:cNvPr>
@@ -6621,7 +6622,7 @@
         </p:nvSpPr>
         <p:spPr>
           <a:xfrm>
-            <a:off x="837724" y="4828223"/>
+            <a:off x="5907147" y="4564627"/>
             <a:ext cx="6185535" cy="383024"/>
           </a:xfrm>
           <a:prstGeom prst="rect">
@@ -6642,12 +6643,20 @@
               <a:buChar char="•"/>
             </a:pPr>
             <a:r>
-              <a:rPr lang="en-US" sz="1850" dirty="0">
+              <a:rPr lang="zh-TW" altLang="en-US" sz="1850" dirty="0">
                 <a:latin typeface="Cabin" pitchFamily="34" charset="0"/>
                 <a:ea typeface="Cabin" pitchFamily="34" charset="-122"/>
                 <a:cs typeface="Cabin" pitchFamily="34" charset="-120"/>
               </a:rPr>
-              <a:t>Spring Boot 強大後端</a:t>
+              <a:t>完善</a:t>
+            </a:r>
+            <a:r>
+              <a:rPr lang="en-US" sz="1850" dirty="0" err="1">
+                <a:latin typeface="Cabin" pitchFamily="34" charset="0"/>
+                <a:ea typeface="Cabin" pitchFamily="34" charset="-122"/>
+                <a:cs typeface="Cabin" pitchFamily="34" charset="-120"/>
+              </a:rPr>
+              <a:t>推薦系統</a:t>
             </a:r>
             <a:endParaRPr lang="en-US" sz="1850" dirty="0"/>
           </a:p>
@@ -6655,10 +6664,10 @@
       </p:sp>
       <p:sp>
         <p:nvSpPr>
-          <p:cNvPr id="6" name="Text 4">
-            <a:extLst>
-              <a:ext uri="{FF2B5EF4-FFF2-40B4-BE49-F238E27FC236}">
-                <a16:creationId xmlns:a16="http://schemas.microsoft.com/office/drawing/2014/main" id="{EF21B18F-99E9-492C-5B8C-DE9CA44812F5}"/>
+          <p:cNvPr id="11" name="Text 8">
+            <a:extLst>
+              <a:ext uri="{FF2B5EF4-FFF2-40B4-BE49-F238E27FC236}">
+                <a16:creationId xmlns:a16="http://schemas.microsoft.com/office/drawing/2014/main" id="{00062358-1EDA-B75A-D993-678F1ABC08F9}"/>
               </a:ext>
             </a:extLst>
           </p:cNvPr>
@@ -6667,7 +6676,7 @@
         </p:nvSpPr>
         <p:spPr>
           <a:xfrm>
-            <a:off x="837724" y="5294948"/>
+            <a:off x="5907146" y="5604533"/>
             <a:ext cx="6185535" cy="383024"/>
           </a:xfrm>
           <a:prstGeom prst="rect">
@@ -6688,12 +6697,20 @@
               <a:buChar char="•"/>
             </a:pPr>
             <a:r>
-              <a:rPr lang="en-US" sz="1850" dirty="0">
+              <a:rPr lang="zh-TW" altLang="en-US" sz="1850" dirty="0">
                 <a:latin typeface="Cabin" pitchFamily="34" charset="0"/>
                 <a:ea typeface="Cabin" pitchFamily="34" charset="-122"/>
                 <a:cs typeface="Cabin" pitchFamily="34" charset="-120"/>
               </a:rPr>
-              <a:t>MySQL 穩定資料庫</a:t>
+              <a:t>完善通知</a:t>
+            </a:r>
+            <a:r>
+              <a:rPr lang="en-US" altLang="zh-TW" sz="1850" dirty="0" err="1">
+                <a:latin typeface="Cabin" pitchFamily="34" charset="0"/>
+                <a:ea typeface="Cabin" pitchFamily="34" charset="-122"/>
+                <a:cs typeface="Cabin" pitchFamily="34" charset="-120"/>
+              </a:rPr>
+              <a:t>系統</a:t>
             </a:r>
             <a:endParaRPr lang="en-US" sz="1850" dirty="0"/>
           </a:p>
@@ -6701,10 +6718,10 @@
       </p:sp>
       <p:sp>
         <p:nvSpPr>
-          <p:cNvPr id="7" name="Text 5">
-            <a:extLst>
-              <a:ext uri="{FF2B5EF4-FFF2-40B4-BE49-F238E27FC236}">
-                <a16:creationId xmlns:a16="http://schemas.microsoft.com/office/drawing/2014/main" id="{86BEF0FC-6390-1497-F4EC-574402A2FE09}"/>
+          <p:cNvPr id="12" name="Text 8">
+            <a:extLst>
+              <a:ext uri="{FF2B5EF4-FFF2-40B4-BE49-F238E27FC236}">
+                <a16:creationId xmlns:a16="http://schemas.microsoft.com/office/drawing/2014/main" id="{53AA341C-D24A-D785-800B-656C55B37B2D}"/>
               </a:ext>
             </a:extLst>
           </p:cNvPr>
@@ -6713,52 +6730,7 @@
         </p:nvSpPr>
         <p:spPr>
           <a:xfrm>
-            <a:off x="7614761" y="3770233"/>
-            <a:ext cx="2816185" cy="351949"/>
-          </a:xfrm>
-          <a:prstGeom prst="rect">
-            <a:avLst/>
-          </a:prstGeom>
-          <a:noFill/>
-          <a:ln/>
-        </p:spPr>
-        <p:txBody>
-          <a:bodyPr wrap="none" lIns="0" tIns="0" rIns="0" bIns="0" rtlCol="0" anchor="t"/>
-          <a:lstStyle/>
-          <a:p>
-            <a:pPr marL="0" indent="0" algn="l">
-              <a:lnSpc>
-                <a:spcPts val="2750"/>
-              </a:lnSpc>
-              <a:buNone/>
-            </a:pPr>
-            <a:r>
-              <a:rPr lang="en-US" sz="2200" dirty="0">
-                <a:latin typeface="Unbounded" pitchFamily="34" charset="0"/>
-                <a:ea typeface="Unbounded" pitchFamily="34" charset="-122"/>
-                <a:cs typeface="Unbounded" pitchFamily="34" charset="-120"/>
-              </a:rPr>
-              <a:t>未來功能擴展</a:t>
-            </a:r>
-            <a:endParaRPr lang="en-US" sz="2200" dirty="0"/>
-          </a:p>
-        </p:txBody>
-      </p:sp>
-      <p:sp>
-        <p:nvSpPr>
-          <p:cNvPr id="8" name="Text 6">
-            <a:extLst>
-              <a:ext uri="{FF2B5EF4-FFF2-40B4-BE49-F238E27FC236}">
-                <a16:creationId xmlns:a16="http://schemas.microsoft.com/office/drawing/2014/main" id="{80252D43-CF65-35D9-E01C-9E4F536F7CC7}"/>
-              </a:ext>
-            </a:extLst>
-          </p:cNvPr>
-          <p:cNvSpPr/>
-          <p:nvPr/>
-        </p:nvSpPr>
-        <p:spPr>
-          <a:xfrm>
-            <a:off x="7614761" y="4361498"/>
+            <a:off x="5907146" y="5048806"/>
             <a:ext cx="6185535" cy="383024"/>
           </a:xfrm>
           <a:prstGeom prst="rect">
@@ -6779,23 +6751,95 @@
               <a:buChar char="•"/>
             </a:pPr>
             <a:r>
-              <a:rPr lang="en-US" sz="1850" dirty="0">
+              <a:rPr lang="zh-TW" altLang="en-US" sz="1850" dirty="0">
                 <a:latin typeface="Cabin" pitchFamily="34" charset="0"/>
                 <a:ea typeface="Cabin" pitchFamily="34" charset="-122"/>
                 <a:cs typeface="Cabin" pitchFamily="34" charset="-120"/>
               </a:rPr>
-              <a:t>整合真實物流與支付</a:t>
+              <a:t>完善訂單</a:t>
+            </a:r>
+            <a:r>
+              <a:rPr lang="en-US" altLang="zh-TW" sz="1850" dirty="0" err="1">
+                <a:latin typeface="Cabin" pitchFamily="34" charset="0"/>
+                <a:ea typeface="Cabin" pitchFamily="34" charset="-122"/>
+                <a:cs typeface="Cabin" pitchFamily="34" charset="-120"/>
+              </a:rPr>
+              <a:t>物流系統</a:t>
             </a:r>
             <a:endParaRPr lang="en-US" sz="1850" dirty="0"/>
           </a:p>
         </p:txBody>
       </p:sp>
-      <p:sp>
-        <p:nvSpPr>
-          <p:cNvPr id="10" name="Text 8">
-            <a:extLst>
-              <a:ext uri="{FF2B5EF4-FFF2-40B4-BE49-F238E27FC236}">
-                <a16:creationId xmlns:a16="http://schemas.microsoft.com/office/drawing/2014/main" id="{D611A246-5FF8-10E3-B3D6-9B1DA498610E}"/>
+    </p:spTree>
+    <p:extLst>
+      <p:ext uri="{BB962C8B-B14F-4D97-AF65-F5344CB8AC3E}">
+        <p14:creationId xmlns:p14="http://schemas.microsoft.com/office/powerpoint/2010/main" val="3389910007"/>
+      </p:ext>
+    </p:extLst>
+  </p:cSld>
+  <p:clrMapOvr>
+    <a:masterClrMapping/>
+  </p:clrMapOvr>
+</p:sld>
+</file>
+
+<file path=ppt/slides/slide21.xml><?xml version="1.0" encoding="utf-8"?>
+<p:sld xmlns:a="http://schemas.openxmlformats.org/drawingml/2006/main" xmlns:r="http://schemas.openxmlformats.org/officeDocument/2006/relationships" xmlns:p="http://schemas.openxmlformats.org/presentationml/2006/main">
+  <p:cSld>
+    <p:bg>
+      <p:bgPr>
+        <a:gradFill>
+          <a:gsLst>
+            <a:gs pos="0">
+              <a:schemeClr val="accent1">
+                <a:lumMod val="5000"/>
+                <a:lumOff val="95000"/>
+              </a:schemeClr>
+            </a:gs>
+            <a:gs pos="74000">
+              <a:schemeClr val="accent1">
+                <a:lumMod val="45000"/>
+                <a:lumOff val="55000"/>
+              </a:schemeClr>
+            </a:gs>
+            <a:gs pos="83000">
+              <a:schemeClr val="accent1">
+                <a:lumMod val="45000"/>
+                <a:lumOff val="55000"/>
+              </a:schemeClr>
+            </a:gs>
+            <a:gs pos="100000">
+              <a:schemeClr val="accent1">
+                <a:lumMod val="30000"/>
+                <a:lumOff val="70000"/>
+              </a:schemeClr>
+            </a:gs>
+          </a:gsLst>
+          <a:lin ang="5400000" scaled="1"/>
+        </a:gradFill>
+        <a:effectLst/>
+      </p:bgPr>
+    </p:bg>
+    <p:spTree>
+      <p:nvGrpSpPr>
+        <p:cNvPr id="1" name=""/>
+        <p:cNvGrpSpPr/>
+        <p:nvPr/>
+      </p:nvGrpSpPr>
+      <p:grpSpPr>
+        <a:xfrm>
+          <a:off x="0" y="0"/>
+          <a:ext cx="0" cy="0"/>
+          <a:chOff x="0" y="0"/>
+          <a:chExt cx="0" cy="0"/>
+        </a:xfrm>
+      </p:grpSpPr>
+      <p:sp>
+        <p:nvSpPr>
+          <p:cNvPr id="2" name="Text 0">
+            <a:extLst>
+              <a:ext uri="{FF2B5EF4-FFF2-40B4-BE49-F238E27FC236}">
+                <a16:creationId xmlns:a16="http://schemas.microsoft.com/office/drawing/2014/main" id="{D86F5ABA-0B58-8CD4-CC56-B5665FB81ADD}"/>
               </a:ext>
             </a:extLst>
           </p:cNvPr>
@@ -6804,7 +6848,98 @@
         </p:nvSpPr>
         <p:spPr>
           <a:xfrm>
-            <a:off x="7614761" y="4895133"/>
+            <a:off x="6423276" y="1942552"/>
+            <a:ext cx="5632490" cy="704017"/>
+          </a:xfrm>
+          <a:prstGeom prst="rect">
+            <a:avLst/>
+          </a:prstGeom>
+          <a:noFill/>
+          <a:ln/>
+        </p:spPr>
+        <p:txBody>
+          <a:bodyPr wrap="none" lIns="0" tIns="0" rIns="0" bIns="0" rtlCol="0" anchor="t"/>
+          <a:lstStyle/>
+          <a:p>
+            <a:pPr marL="0" indent="0" algn="l">
+              <a:lnSpc>
+                <a:spcPts val="5500"/>
+              </a:lnSpc>
+              <a:buNone/>
+            </a:pPr>
+            <a:r>
+              <a:rPr lang="zh-TW" altLang="en-US" sz="4400" dirty="0">
+                <a:latin typeface="Unbounded" pitchFamily="34" charset="0"/>
+                <a:ea typeface="Unbounded" pitchFamily="34" charset="-122"/>
+              </a:rPr>
+              <a:t>結束</a:t>
+            </a:r>
+            <a:endParaRPr lang="en-US" sz="4400" dirty="0"/>
+          </a:p>
+        </p:txBody>
+      </p:sp>
+      <p:sp>
+        <p:nvSpPr>
+          <p:cNvPr id="3" name="Text 1">
+            <a:extLst>
+              <a:ext uri="{FF2B5EF4-FFF2-40B4-BE49-F238E27FC236}">
+                <a16:creationId xmlns:a16="http://schemas.microsoft.com/office/drawing/2014/main" id="{E8FEE2E1-1E85-EEEE-7325-2D108C73AF3D}"/>
+              </a:ext>
+            </a:extLst>
+          </p:cNvPr>
+          <p:cNvSpPr/>
+          <p:nvPr/>
+        </p:nvSpPr>
+        <p:spPr>
+          <a:xfrm>
+            <a:off x="837724" y="3770233"/>
+            <a:ext cx="2816185" cy="351949"/>
+          </a:xfrm>
+          <a:prstGeom prst="rect">
+            <a:avLst/>
+          </a:prstGeom>
+          <a:noFill/>
+          <a:ln/>
+        </p:spPr>
+        <p:txBody>
+          <a:bodyPr wrap="none" lIns="0" tIns="0" rIns="0" bIns="0" rtlCol="0" anchor="t"/>
+          <a:lstStyle/>
+          <a:p>
+            <a:pPr marL="0" indent="0" algn="l">
+              <a:lnSpc>
+                <a:spcPts val="2750"/>
+              </a:lnSpc>
+              <a:buNone/>
+            </a:pPr>
+            <a:r>
+              <a:rPr lang="en-US" sz="2200" dirty="0" err="1">
+                <a:latin typeface="Unbounded" pitchFamily="34" charset="0"/>
+                <a:ea typeface="Unbounded" pitchFamily="34" charset="-122"/>
+              </a:rPr>
+              <a:t>Github</a:t>
+            </a:r>
+            <a:endParaRPr lang="en-US" sz="2200" dirty="0">
+              <a:latin typeface="Unbounded" pitchFamily="34" charset="0"/>
+              <a:ea typeface="Unbounded" pitchFamily="34" charset="-122"/>
+            </a:endParaRPr>
+          </a:p>
+        </p:txBody>
+      </p:sp>
+      <p:sp>
+        <p:nvSpPr>
+          <p:cNvPr id="4" name="Text 2">
+            <a:extLst>
+              <a:ext uri="{FF2B5EF4-FFF2-40B4-BE49-F238E27FC236}">
+                <a16:creationId xmlns:a16="http://schemas.microsoft.com/office/drawing/2014/main" id="{71C51FCE-3E66-78F1-6A11-6A5C36BF09F3}"/>
+              </a:ext>
+            </a:extLst>
+          </p:cNvPr>
+          <p:cNvSpPr/>
+          <p:nvPr/>
+        </p:nvSpPr>
+        <p:spPr>
+          <a:xfrm>
+            <a:off x="765954" y="4337446"/>
             <a:ext cx="6185535" cy="383024"/>
           </a:xfrm>
           <a:prstGeom prst="rect">
@@ -6825,31 +6960,18 @@
               <a:buChar char="•"/>
             </a:pPr>
             <a:r>
-              <a:rPr lang="zh-TW" altLang="en-US" sz="1850" dirty="0">
-                <a:latin typeface="Cabin" pitchFamily="34" charset="0"/>
-                <a:ea typeface="Cabin" pitchFamily="34" charset="-122"/>
-                <a:cs typeface="Cabin" pitchFamily="34" charset="-120"/>
-              </a:rPr>
-              <a:t>完善</a:t>
-            </a:r>
-            <a:r>
-              <a:rPr lang="en-US" sz="1850" dirty="0" err="1">
-                <a:latin typeface="Cabin" pitchFamily="34" charset="0"/>
-                <a:ea typeface="Cabin" pitchFamily="34" charset="-122"/>
-                <a:cs typeface="Cabin" pitchFamily="34" charset="-120"/>
-              </a:rPr>
-              <a:t>推薦系統</a:t>
-            </a:r>
-            <a:endParaRPr lang="en-US" sz="1850" dirty="0"/>
-          </a:p>
-        </p:txBody>
-      </p:sp>
-      <p:sp>
-        <p:nvSpPr>
-          <p:cNvPr id="11" name="Text 8">
-            <a:extLst>
-              <a:ext uri="{FF2B5EF4-FFF2-40B4-BE49-F238E27FC236}">
-                <a16:creationId xmlns:a16="http://schemas.microsoft.com/office/drawing/2014/main" id="{00062358-1EDA-B75A-D993-678F1ABC08F9}"/>
+              <a:rPr lang="en-US" sz="1850" dirty="0"/>
+              <a:t>https://github.com/Balabababala/shoppingProject</a:t>
+            </a:r>
+          </a:p>
+        </p:txBody>
+      </p:sp>
+      <p:sp>
+        <p:nvSpPr>
+          <p:cNvPr id="7" name="Text 5">
+            <a:extLst>
+              <a:ext uri="{FF2B5EF4-FFF2-40B4-BE49-F238E27FC236}">
+                <a16:creationId xmlns:a16="http://schemas.microsoft.com/office/drawing/2014/main" id="{86BEF0FC-6390-1497-F4EC-574402A2FE09}"/>
               </a:ext>
             </a:extLst>
           </p:cNvPr>
@@ -6858,8 +6980,8 @@
         </p:nvSpPr>
         <p:spPr>
           <a:xfrm>
-            <a:off x="7614760" y="5935039"/>
-            <a:ext cx="6185535" cy="383024"/>
+            <a:off x="7614761" y="3770233"/>
+            <a:ext cx="2816185" cy="351949"/>
           </a:xfrm>
           <a:prstGeom prst="rect">
             <a:avLst/>
@@ -6871,91 +6993,70 @@
           <a:bodyPr wrap="none" lIns="0" tIns="0" rIns="0" bIns="0" rtlCol="0" anchor="t"/>
           <a:lstStyle/>
           <a:p>
-            <a:pPr marL="342900" indent="-342900" algn="l">
+            <a:pPr marL="0" indent="0" algn="l">
               <a:lnSpc>
-                <a:spcPts val="3000"/>
+                <a:spcPts val="2750"/>
               </a:lnSpc>
-              <a:buSzPct val="100000"/>
-              <a:buChar char="•"/>
+              <a:buNone/>
             </a:pPr>
             <a:r>
-              <a:rPr lang="zh-TW" altLang="en-US" sz="1850" dirty="0">
-                <a:latin typeface="Cabin" pitchFamily="34" charset="0"/>
-                <a:ea typeface="Cabin" pitchFamily="34" charset="-122"/>
-                <a:cs typeface="Cabin" pitchFamily="34" charset="-120"/>
-              </a:rPr>
-              <a:t>完善通知</a:t>
-            </a:r>
-            <a:r>
-              <a:rPr lang="en-US" altLang="zh-TW" sz="1850" dirty="0" err="1">
-                <a:latin typeface="Cabin" pitchFamily="34" charset="0"/>
-                <a:ea typeface="Cabin" pitchFamily="34" charset="-122"/>
-                <a:cs typeface="Cabin" pitchFamily="34" charset="-120"/>
-              </a:rPr>
-              <a:t>系統</a:t>
-            </a:r>
-            <a:endParaRPr lang="en-US" sz="1850" dirty="0"/>
-          </a:p>
-        </p:txBody>
-      </p:sp>
-      <p:sp>
-        <p:nvSpPr>
-          <p:cNvPr id="12" name="Text 8">
-            <a:extLst>
-              <a:ext uri="{FF2B5EF4-FFF2-40B4-BE49-F238E27FC236}">
-                <a16:creationId xmlns:a16="http://schemas.microsoft.com/office/drawing/2014/main" id="{53AA341C-D24A-D785-800B-656C55B37B2D}"/>
-              </a:ext>
-            </a:extLst>
-          </p:cNvPr>
-          <p:cNvSpPr/>
-          <p:nvPr/>
-        </p:nvSpPr>
-        <p:spPr>
-          <a:xfrm>
-            <a:off x="7614760" y="5379312"/>
-            <a:ext cx="6185535" cy="383024"/>
-          </a:xfrm>
-          <a:prstGeom prst="rect">
-            <a:avLst/>
-          </a:prstGeom>
-          <a:noFill/>
-          <a:ln/>
-        </p:spPr>
-        <p:txBody>
-          <a:bodyPr wrap="none" lIns="0" tIns="0" rIns="0" bIns="0" rtlCol="0" anchor="t"/>
-          <a:lstStyle/>
-          <a:p>
-            <a:pPr marL="342900" indent="-342900" algn="l">
-              <a:lnSpc>
-                <a:spcPts val="3000"/>
-              </a:lnSpc>
-              <a:buSzPct val="100000"/>
-              <a:buChar char="•"/>
-            </a:pPr>
-            <a:r>
-              <a:rPr lang="zh-TW" altLang="en-US" sz="1850" dirty="0">
-                <a:latin typeface="Cabin" pitchFamily="34" charset="0"/>
-                <a:ea typeface="Cabin" pitchFamily="34" charset="-122"/>
-                <a:cs typeface="Cabin" pitchFamily="34" charset="-120"/>
-              </a:rPr>
-              <a:t>完善訂單</a:t>
-            </a:r>
-            <a:r>
-              <a:rPr lang="en-US" altLang="zh-TW" sz="1850" dirty="0" err="1">
-                <a:latin typeface="Cabin" pitchFamily="34" charset="0"/>
-                <a:ea typeface="Cabin" pitchFamily="34" charset="-122"/>
-                <a:cs typeface="Cabin" pitchFamily="34" charset="-120"/>
-              </a:rPr>
-              <a:t>物流系統</a:t>
-            </a:r>
-            <a:endParaRPr lang="en-US" sz="1850" dirty="0"/>
-          </a:p>
-        </p:txBody>
-      </p:sp>
+              <a:rPr lang="en-US" altLang="zh-TW" sz="2200" dirty="0">
+                <a:latin typeface="Unbounded" pitchFamily="34" charset="0"/>
+                <a:ea typeface="Unbounded" pitchFamily="34" charset="-122"/>
+              </a:rPr>
+              <a:t>19_</a:t>
+            </a:r>
+            <a:r>
+              <a:rPr lang="zh-TW" altLang="en-US" sz="2200" dirty="0">
+                <a:latin typeface="Unbounded" pitchFamily="34" charset="0"/>
+                <a:ea typeface="Unbounded" pitchFamily="34" charset="-122"/>
+              </a:rPr>
+              <a:t>張允豪</a:t>
+            </a:r>
+            <a:endParaRPr lang="en-US" sz="2200" dirty="0"/>
+          </a:p>
+        </p:txBody>
+      </p:sp>
+      <p:pic>
+        <p:nvPicPr>
+          <p:cNvPr id="13" name="圖片 12" descr="一張含有 樣式, 像素, 設計 的圖片&#10;&#10;AI 產生的內容可能不正確。">
+            <a:extLst>
+              <a:ext uri="{FF2B5EF4-FFF2-40B4-BE49-F238E27FC236}">
+                <a16:creationId xmlns:a16="http://schemas.microsoft.com/office/drawing/2014/main" id="{3D2B7422-627D-DE79-40B7-725C9977D2F9}"/>
+              </a:ext>
+            </a:extLst>
+          </p:cNvPr>
+          <p:cNvPicPr>
+            <a:picLocks noChangeAspect="1"/>
+          </p:cNvPicPr>
+          <p:nvPr/>
+        </p:nvPicPr>
+        <p:blipFill>
+          <a:blip r:embed="rId2">
+            <a:extLst>
+              <a:ext uri="{28A0092B-C50C-407E-A947-70E740481C1C}">
+                <a14:useLocalDpi xmlns:a14="http://schemas.microsoft.com/office/drawing/2010/main" val="0"/>
+              </a:ext>
+            </a:extLst>
+          </a:blip>
+          <a:stretch>
+            <a:fillRect/>
+          </a:stretch>
+        </p:blipFill>
+        <p:spPr>
+          <a:xfrm>
+            <a:off x="980111" y="4935733"/>
+            <a:ext cx="2903519" cy="2903519"/>
+          </a:xfrm>
+          <a:prstGeom prst="rect">
+            <a:avLst/>
+          </a:prstGeom>
+        </p:spPr>
+      </p:pic>
     </p:spTree>
     <p:extLst>
       <p:ext uri="{BB962C8B-B14F-4D97-AF65-F5344CB8AC3E}">
-        <p14:creationId xmlns:p14="http://schemas.microsoft.com/office/powerpoint/2010/main" val="3389910007"/>
+        <p14:creationId xmlns:p14="http://schemas.microsoft.com/office/powerpoint/2010/main" val="1153240472"/>
       </p:ext>
     </p:extLst>
   </p:cSld>

--- a/說明用工具/張允豪 購物網站 專題 ver.0.5.pptx
+++ b/說明用工具/張允豪 購物網站 專題 ver.0.5.pptx
@@ -263,7 +263,7 @@
           <a:p>
             <a:fld id="{163F0119-99E8-4B39-9AE3-1AFDAA3321B4}" type="datetimeFigureOut">
               <a:rPr lang="zh-TW" altLang="en-US" smtClean="0"/>
-              <a:t>2025/6/27</a:t>
+              <a:t>2025/6/29</a:t>
             </a:fld>
             <a:endParaRPr lang="zh-TW" altLang="en-US"/>
           </a:p>
@@ -433,7 +433,7 @@
           <a:p>
             <a:fld id="{163F0119-99E8-4B39-9AE3-1AFDAA3321B4}" type="datetimeFigureOut">
               <a:rPr lang="zh-TW" altLang="en-US" smtClean="0"/>
-              <a:t>2025/6/27</a:t>
+              <a:t>2025/6/29</a:t>
             </a:fld>
             <a:endParaRPr lang="zh-TW" altLang="en-US"/>
           </a:p>
@@ -613,7 +613,7 @@
           <a:p>
             <a:fld id="{163F0119-99E8-4B39-9AE3-1AFDAA3321B4}" type="datetimeFigureOut">
               <a:rPr lang="zh-TW" altLang="en-US" smtClean="0"/>
-              <a:t>2025/6/27</a:t>
+              <a:t>2025/6/29</a:t>
             </a:fld>
             <a:endParaRPr lang="zh-TW" altLang="en-US"/>
           </a:p>
@@ -783,7 +783,7 @@
           <a:p>
             <a:fld id="{163F0119-99E8-4B39-9AE3-1AFDAA3321B4}" type="datetimeFigureOut">
               <a:rPr lang="zh-TW" altLang="en-US" smtClean="0"/>
-              <a:t>2025/6/27</a:t>
+              <a:t>2025/6/29</a:t>
             </a:fld>
             <a:endParaRPr lang="zh-TW" altLang="en-US"/>
           </a:p>
@@ -1029,7 +1029,7 @@
           <a:p>
             <a:fld id="{163F0119-99E8-4B39-9AE3-1AFDAA3321B4}" type="datetimeFigureOut">
               <a:rPr lang="zh-TW" altLang="en-US" smtClean="0"/>
-              <a:t>2025/6/27</a:t>
+              <a:t>2025/6/29</a:t>
             </a:fld>
             <a:endParaRPr lang="zh-TW" altLang="en-US"/>
           </a:p>
@@ -1261,7 +1261,7 @@
           <a:p>
             <a:fld id="{163F0119-99E8-4B39-9AE3-1AFDAA3321B4}" type="datetimeFigureOut">
               <a:rPr lang="zh-TW" altLang="en-US" smtClean="0"/>
-              <a:t>2025/6/27</a:t>
+              <a:t>2025/6/29</a:t>
             </a:fld>
             <a:endParaRPr lang="zh-TW" altLang="en-US"/>
           </a:p>
@@ -1628,7 +1628,7 @@
           <a:p>
             <a:fld id="{163F0119-99E8-4B39-9AE3-1AFDAA3321B4}" type="datetimeFigureOut">
               <a:rPr lang="zh-TW" altLang="en-US" smtClean="0"/>
-              <a:t>2025/6/27</a:t>
+              <a:t>2025/6/29</a:t>
             </a:fld>
             <a:endParaRPr lang="zh-TW" altLang="en-US"/>
           </a:p>
@@ -1746,7 +1746,7 @@
           <a:p>
             <a:fld id="{163F0119-99E8-4B39-9AE3-1AFDAA3321B4}" type="datetimeFigureOut">
               <a:rPr lang="zh-TW" altLang="en-US" smtClean="0"/>
-              <a:t>2025/6/27</a:t>
+              <a:t>2025/6/29</a:t>
             </a:fld>
             <a:endParaRPr lang="zh-TW" altLang="en-US"/>
           </a:p>
@@ -1841,7 +1841,7 @@
           <a:p>
             <a:fld id="{163F0119-99E8-4B39-9AE3-1AFDAA3321B4}" type="datetimeFigureOut">
               <a:rPr lang="zh-TW" altLang="en-US" smtClean="0"/>
-              <a:t>2025/6/27</a:t>
+              <a:t>2025/6/29</a:t>
             </a:fld>
             <a:endParaRPr lang="zh-TW" altLang="en-US"/>
           </a:p>
@@ -2118,7 +2118,7 @@
           <a:p>
             <a:fld id="{163F0119-99E8-4B39-9AE3-1AFDAA3321B4}" type="datetimeFigureOut">
               <a:rPr lang="zh-TW" altLang="en-US" smtClean="0"/>
-              <a:t>2025/6/27</a:t>
+              <a:t>2025/6/29</a:t>
             </a:fld>
             <a:endParaRPr lang="zh-TW" altLang="en-US"/>
           </a:p>
@@ -2375,7 +2375,7 @@
           <a:p>
             <a:fld id="{163F0119-99E8-4B39-9AE3-1AFDAA3321B4}" type="datetimeFigureOut">
               <a:rPr lang="zh-TW" altLang="en-US" smtClean="0"/>
-              <a:t>2025/6/27</a:t>
+              <a:t>2025/6/29</a:t>
             </a:fld>
             <a:endParaRPr lang="zh-TW" altLang="en-US"/>
           </a:p>
@@ -2593,7 +2593,7 @@
           <a:p>
             <a:fld id="{163F0119-99E8-4B39-9AE3-1AFDAA3321B4}" type="datetimeFigureOut">
               <a:rPr lang="zh-TW" altLang="en-US" smtClean="0"/>
-              <a:t>2025/6/27</a:t>
+              <a:t>2025/6/29</a:t>
             </a:fld>
             <a:endParaRPr lang="zh-TW" altLang="en-US"/>
           </a:p>
@@ -3037,7 +3037,7 @@
           <p:cNvPr id="41" name="Text 0">
             <a:extLst>
               <a:ext uri="{FF2B5EF4-FFF2-40B4-BE49-F238E27FC236}">
-                <a16:creationId xmlns:a16="http://schemas.microsoft.com/office/drawing/2014/main" id="{C95CF852-25B4-EB48-5D84-4B7AF9A6D01A}"/>
+                <a16:creationId xmlns="" xmlns:a16="http://schemas.microsoft.com/office/drawing/2014/main" id="{C95CF852-25B4-EB48-5D84-4B7AF9A6D01A}"/>
               </a:ext>
             </a:extLst>
           </p:cNvPr>
@@ -3081,7 +3081,7 @@
           <p:cNvPr id="44" name="Text 3">
             <a:extLst>
               <a:ext uri="{FF2B5EF4-FFF2-40B4-BE49-F238E27FC236}">
-                <a16:creationId xmlns:a16="http://schemas.microsoft.com/office/drawing/2014/main" id="{9AB370BD-A1D1-6909-9B09-0A6E8830B946}"/>
+                <a16:creationId xmlns="" xmlns:a16="http://schemas.microsoft.com/office/drawing/2014/main" id="{9AB370BD-A1D1-6909-9B09-0A6E8830B946}"/>
               </a:ext>
             </a:extLst>
           </p:cNvPr>
@@ -3142,7 +3142,7 @@
           <p:cNvPr id="2" name="Text 2">
             <a:extLst>
               <a:ext uri="{FF2B5EF4-FFF2-40B4-BE49-F238E27FC236}">
-                <a16:creationId xmlns:a16="http://schemas.microsoft.com/office/drawing/2014/main" id="{2E9D9B67-3FAA-0D94-DF6A-982057B29BC1}"/>
+                <a16:creationId xmlns="" xmlns:a16="http://schemas.microsoft.com/office/drawing/2014/main" id="{2E9D9B67-3FAA-0D94-DF6A-982057B29BC1}"/>
               </a:ext>
             </a:extLst>
           </p:cNvPr>
@@ -3269,7 +3269,7 @@
           <p:cNvPr id="3" name="Text 0">
             <a:extLst>
               <a:ext uri="{FF2B5EF4-FFF2-40B4-BE49-F238E27FC236}">
-                <a16:creationId xmlns:a16="http://schemas.microsoft.com/office/drawing/2014/main" id="{8BF2A6AB-1F7E-9633-389D-D723B15A9392}"/>
+                <a16:creationId xmlns="" xmlns:a16="http://schemas.microsoft.com/office/drawing/2014/main" id="{8BF2A6AB-1F7E-9633-389D-D723B15A9392}"/>
               </a:ext>
             </a:extLst>
           </p:cNvPr>
@@ -3314,7 +3314,7 @@
           <p:cNvPr id="14" name="Text 5">
             <a:extLst>
               <a:ext uri="{FF2B5EF4-FFF2-40B4-BE49-F238E27FC236}">
-                <a16:creationId xmlns:a16="http://schemas.microsoft.com/office/drawing/2014/main" id="{F636048F-4C36-6D44-AA6F-5D21733034BE}"/>
+                <a16:creationId xmlns="" xmlns:a16="http://schemas.microsoft.com/office/drawing/2014/main" id="{F636048F-4C36-6D44-AA6F-5D21733034BE}"/>
               </a:ext>
             </a:extLst>
           </p:cNvPr>
@@ -3360,7 +3360,7 @@
           <p:cNvPr id="16" name="Text 6">
             <a:extLst>
               <a:ext uri="{FF2B5EF4-FFF2-40B4-BE49-F238E27FC236}">
-                <a16:creationId xmlns:a16="http://schemas.microsoft.com/office/drawing/2014/main" id="{6BBFCEEE-A067-D3FE-98EA-BF5239A138DB}"/>
+                <a16:creationId xmlns="" xmlns:a16="http://schemas.microsoft.com/office/drawing/2014/main" id="{6BBFCEEE-A067-D3FE-98EA-BF5239A138DB}"/>
               </a:ext>
             </a:extLst>
           </p:cNvPr>
@@ -3432,7 +3432,7 @@
           <p:cNvPr id="4" name="Text 6">
             <a:extLst>
               <a:ext uri="{FF2B5EF4-FFF2-40B4-BE49-F238E27FC236}">
-                <a16:creationId xmlns:a16="http://schemas.microsoft.com/office/drawing/2014/main" id="{4549F78B-50F6-7021-584B-3E136D008FA7}"/>
+                <a16:creationId xmlns="" xmlns:a16="http://schemas.microsoft.com/office/drawing/2014/main" id="{4549F78B-50F6-7021-584B-3E136D008FA7}"/>
               </a:ext>
             </a:extLst>
           </p:cNvPr>
@@ -3544,7 +3544,7 @@
           <p:cNvPr id="3" name="Text 0">
             <a:extLst>
               <a:ext uri="{FF2B5EF4-FFF2-40B4-BE49-F238E27FC236}">
-                <a16:creationId xmlns:a16="http://schemas.microsoft.com/office/drawing/2014/main" id="{8BF2A6AB-1F7E-9633-389D-D723B15A9392}"/>
+                <a16:creationId xmlns="" xmlns:a16="http://schemas.microsoft.com/office/drawing/2014/main" id="{8BF2A6AB-1F7E-9633-389D-D723B15A9392}"/>
               </a:ext>
             </a:extLst>
           </p:cNvPr>
@@ -3589,7 +3589,7 @@
           <p:cNvPr id="14" name="Text 5">
             <a:extLst>
               <a:ext uri="{FF2B5EF4-FFF2-40B4-BE49-F238E27FC236}">
-                <a16:creationId xmlns:a16="http://schemas.microsoft.com/office/drawing/2014/main" id="{F636048F-4C36-6D44-AA6F-5D21733034BE}"/>
+                <a16:creationId xmlns="" xmlns:a16="http://schemas.microsoft.com/office/drawing/2014/main" id="{F636048F-4C36-6D44-AA6F-5D21733034BE}"/>
               </a:ext>
             </a:extLst>
           </p:cNvPr>
@@ -3633,7 +3633,7 @@
           <p:cNvPr id="16" name="Text 6">
             <a:extLst>
               <a:ext uri="{FF2B5EF4-FFF2-40B4-BE49-F238E27FC236}">
-                <a16:creationId xmlns:a16="http://schemas.microsoft.com/office/drawing/2014/main" id="{6BBFCEEE-A067-D3FE-98EA-BF5239A138DB}"/>
+                <a16:creationId xmlns="" xmlns:a16="http://schemas.microsoft.com/office/drawing/2014/main" id="{6BBFCEEE-A067-D3FE-98EA-BF5239A138DB}"/>
               </a:ext>
             </a:extLst>
           </p:cNvPr>
@@ -3681,7 +3681,7 @@
           <p:cNvPr id="5" name="圖片 4">
             <a:extLst>
               <a:ext uri="{FF2B5EF4-FFF2-40B4-BE49-F238E27FC236}">
-                <a16:creationId xmlns:a16="http://schemas.microsoft.com/office/drawing/2014/main" id="{FC3EAFA6-3AE7-63E2-F9ED-BCC18BFB61F1}"/>
+                <a16:creationId xmlns="" xmlns:a16="http://schemas.microsoft.com/office/drawing/2014/main" id="{FC3EAFA6-3AE7-63E2-F9ED-BCC18BFB61F1}"/>
               </a:ext>
             </a:extLst>
           </p:cNvPr>
@@ -3775,7 +3775,7 @@
           <p:cNvPr id="3" name="Text 0">
             <a:extLst>
               <a:ext uri="{FF2B5EF4-FFF2-40B4-BE49-F238E27FC236}">
-                <a16:creationId xmlns:a16="http://schemas.microsoft.com/office/drawing/2014/main" id="{8BF2A6AB-1F7E-9633-389D-D723B15A9392}"/>
+                <a16:creationId xmlns="" xmlns:a16="http://schemas.microsoft.com/office/drawing/2014/main" id="{8BF2A6AB-1F7E-9633-389D-D723B15A9392}"/>
               </a:ext>
             </a:extLst>
           </p:cNvPr>
@@ -3820,7 +3820,7 @@
           <p:cNvPr id="14" name="Text 5">
             <a:extLst>
               <a:ext uri="{FF2B5EF4-FFF2-40B4-BE49-F238E27FC236}">
-                <a16:creationId xmlns:a16="http://schemas.microsoft.com/office/drawing/2014/main" id="{F636048F-4C36-6D44-AA6F-5D21733034BE}"/>
+                <a16:creationId xmlns="" xmlns:a16="http://schemas.microsoft.com/office/drawing/2014/main" id="{F636048F-4C36-6D44-AA6F-5D21733034BE}"/>
               </a:ext>
             </a:extLst>
           </p:cNvPr>
@@ -3864,7 +3864,7 @@
           <p:cNvPr id="16" name="Text 6">
             <a:extLst>
               <a:ext uri="{FF2B5EF4-FFF2-40B4-BE49-F238E27FC236}">
-                <a16:creationId xmlns:a16="http://schemas.microsoft.com/office/drawing/2014/main" id="{6BBFCEEE-A067-D3FE-98EA-BF5239A138DB}"/>
+                <a16:creationId xmlns="" xmlns:a16="http://schemas.microsoft.com/office/drawing/2014/main" id="{6BBFCEEE-A067-D3FE-98EA-BF5239A138DB}"/>
               </a:ext>
             </a:extLst>
           </p:cNvPr>
@@ -3912,7 +3912,7 @@
           <p:cNvPr id="7" name="圖片 6">
             <a:extLst>
               <a:ext uri="{FF2B5EF4-FFF2-40B4-BE49-F238E27FC236}">
-                <a16:creationId xmlns:a16="http://schemas.microsoft.com/office/drawing/2014/main" id="{BC58B07D-5BB1-206A-CBFD-A0B11B6EBD15}"/>
+                <a16:creationId xmlns="" xmlns:a16="http://schemas.microsoft.com/office/drawing/2014/main" id="{BC58B07D-5BB1-206A-CBFD-A0B11B6EBD15}"/>
               </a:ext>
             </a:extLst>
           </p:cNvPr>
@@ -3942,7 +3942,7 @@
           <p:cNvPr id="9" name="圖片 8">
             <a:extLst>
               <a:ext uri="{FF2B5EF4-FFF2-40B4-BE49-F238E27FC236}">
-                <a16:creationId xmlns:a16="http://schemas.microsoft.com/office/drawing/2014/main" id="{A91252DA-7787-E81E-C01B-4D3ABC1A23E6}"/>
+                <a16:creationId xmlns="" xmlns:a16="http://schemas.microsoft.com/office/drawing/2014/main" id="{A91252DA-7787-E81E-C01B-4D3ABC1A23E6}"/>
               </a:ext>
             </a:extLst>
           </p:cNvPr>
@@ -4036,7 +4036,7 @@
           <p:cNvPr id="3" name="Text 0">
             <a:extLst>
               <a:ext uri="{FF2B5EF4-FFF2-40B4-BE49-F238E27FC236}">
-                <a16:creationId xmlns:a16="http://schemas.microsoft.com/office/drawing/2014/main" id="{8BF2A6AB-1F7E-9633-389D-D723B15A9392}"/>
+                <a16:creationId xmlns="" xmlns:a16="http://schemas.microsoft.com/office/drawing/2014/main" id="{8BF2A6AB-1F7E-9633-389D-D723B15A9392}"/>
               </a:ext>
             </a:extLst>
           </p:cNvPr>
@@ -4097,7 +4097,7 @@
           <p:cNvPr id="14" name="Text 5">
             <a:extLst>
               <a:ext uri="{FF2B5EF4-FFF2-40B4-BE49-F238E27FC236}">
-                <a16:creationId xmlns:a16="http://schemas.microsoft.com/office/drawing/2014/main" id="{F636048F-4C36-6D44-AA6F-5D21733034BE}"/>
+                <a16:creationId xmlns="" xmlns:a16="http://schemas.microsoft.com/office/drawing/2014/main" id="{F636048F-4C36-6D44-AA6F-5D21733034BE}"/>
               </a:ext>
             </a:extLst>
           </p:cNvPr>
@@ -4143,7 +4143,7 @@
           <p:cNvPr id="16" name="Text 6">
             <a:extLst>
               <a:ext uri="{FF2B5EF4-FFF2-40B4-BE49-F238E27FC236}">
-                <a16:creationId xmlns:a16="http://schemas.microsoft.com/office/drawing/2014/main" id="{6BBFCEEE-A067-D3FE-98EA-BF5239A138DB}"/>
+                <a16:creationId xmlns="" xmlns:a16="http://schemas.microsoft.com/office/drawing/2014/main" id="{6BBFCEEE-A067-D3FE-98EA-BF5239A138DB}"/>
               </a:ext>
             </a:extLst>
           </p:cNvPr>
@@ -4186,7 +4186,7 @@
           <p:cNvPr id="8" name="Text 6">
             <a:extLst>
               <a:ext uri="{FF2B5EF4-FFF2-40B4-BE49-F238E27FC236}">
-                <a16:creationId xmlns:a16="http://schemas.microsoft.com/office/drawing/2014/main" id="{1D5B5560-1CFB-0EF1-820B-C009AD3E3EBE}"/>
+                <a16:creationId xmlns="" xmlns:a16="http://schemas.microsoft.com/office/drawing/2014/main" id="{1D5B5560-1CFB-0EF1-820B-C009AD3E3EBE}"/>
               </a:ext>
             </a:extLst>
           </p:cNvPr>
@@ -4234,7 +4234,7 @@
           <p:cNvPr id="11" name="圖片 10">
             <a:extLst>
               <a:ext uri="{FF2B5EF4-FFF2-40B4-BE49-F238E27FC236}">
-                <a16:creationId xmlns:a16="http://schemas.microsoft.com/office/drawing/2014/main" id="{9199D374-9C23-F5B1-7F41-9D58F7061FC7}"/>
+                <a16:creationId xmlns="" xmlns:a16="http://schemas.microsoft.com/office/drawing/2014/main" id="{9199D374-9C23-F5B1-7F41-9D58F7061FC7}"/>
               </a:ext>
             </a:extLst>
           </p:cNvPr>
@@ -4264,7 +4264,7 @@
           <p:cNvPr id="15" name="圖片 14">
             <a:extLst>
               <a:ext uri="{FF2B5EF4-FFF2-40B4-BE49-F238E27FC236}">
-                <a16:creationId xmlns:a16="http://schemas.microsoft.com/office/drawing/2014/main" id="{FB900FB1-B684-EAC4-247D-BCCFAAF6E101}"/>
+                <a16:creationId xmlns="" xmlns:a16="http://schemas.microsoft.com/office/drawing/2014/main" id="{FB900FB1-B684-EAC4-247D-BCCFAAF6E101}"/>
               </a:ext>
             </a:extLst>
           </p:cNvPr>
@@ -4358,7 +4358,7 @@
           <p:cNvPr id="14" name="Text 0">
             <a:extLst>
               <a:ext uri="{FF2B5EF4-FFF2-40B4-BE49-F238E27FC236}">
-                <a16:creationId xmlns:a16="http://schemas.microsoft.com/office/drawing/2014/main" id="{3BB6AD06-1FAD-E83C-8A0F-5E1DB2F28494}"/>
+                <a16:creationId xmlns="" xmlns:a16="http://schemas.microsoft.com/office/drawing/2014/main" id="{3BB6AD06-1FAD-E83C-8A0F-5E1DB2F28494}"/>
               </a:ext>
             </a:extLst>
           </p:cNvPr>
@@ -4403,7 +4403,7 @@
           <p:cNvPr id="16" name="Text 2">
             <a:extLst>
               <a:ext uri="{FF2B5EF4-FFF2-40B4-BE49-F238E27FC236}">
-                <a16:creationId xmlns:a16="http://schemas.microsoft.com/office/drawing/2014/main" id="{CA008A43-82F8-359E-FEB4-8F6DACD4D05D}"/>
+                <a16:creationId xmlns="" xmlns:a16="http://schemas.microsoft.com/office/drawing/2014/main" id="{CA008A43-82F8-359E-FEB4-8F6DACD4D05D}"/>
               </a:ext>
             </a:extLst>
           </p:cNvPr>
@@ -4480,7 +4480,7 @@
           <p:cNvPr id="18" name="Text 4">
             <a:extLst>
               <a:ext uri="{FF2B5EF4-FFF2-40B4-BE49-F238E27FC236}">
-                <a16:creationId xmlns:a16="http://schemas.microsoft.com/office/drawing/2014/main" id="{88E4F750-718E-D102-AEF8-2593A6462AAD}"/>
+                <a16:creationId xmlns="" xmlns:a16="http://schemas.microsoft.com/office/drawing/2014/main" id="{88E4F750-718E-D102-AEF8-2593A6462AAD}"/>
               </a:ext>
             </a:extLst>
           </p:cNvPr>
@@ -4525,7 +4525,7 @@
           <p:cNvPr id="20" name="Text 6">
             <a:extLst>
               <a:ext uri="{FF2B5EF4-FFF2-40B4-BE49-F238E27FC236}">
-                <a16:creationId xmlns:a16="http://schemas.microsoft.com/office/drawing/2014/main" id="{FA5E5E96-FE36-AEC1-EAF3-180A8F4F51AC}"/>
+                <a16:creationId xmlns="" xmlns:a16="http://schemas.microsoft.com/office/drawing/2014/main" id="{FA5E5E96-FE36-AEC1-EAF3-180A8F4F51AC}"/>
               </a:ext>
             </a:extLst>
           </p:cNvPr>
@@ -4570,7 +4570,7 @@
           <p:cNvPr id="3" name="圖片 2">
             <a:extLst>
               <a:ext uri="{FF2B5EF4-FFF2-40B4-BE49-F238E27FC236}">
-                <a16:creationId xmlns:a16="http://schemas.microsoft.com/office/drawing/2014/main" id="{245A4EB3-EB5B-68F8-A630-E9D47F19EBA3}"/>
+                <a16:creationId xmlns="" xmlns:a16="http://schemas.microsoft.com/office/drawing/2014/main" id="{245A4EB3-EB5B-68F8-A630-E9D47F19EBA3}"/>
               </a:ext>
             </a:extLst>
           </p:cNvPr>
@@ -4600,7 +4600,7 @@
           <p:cNvPr id="9" name="圖片 8">
             <a:extLst>
               <a:ext uri="{FF2B5EF4-FFF2-40B4-BE49-F238E27FC236}">
-                <a16:creationId xmlns:a16="http://schemas.microsoft.com/office/drawing/2014/main" id="{E593F2A7-8AEE-3E6F-1CD2-3F3CA5699923}"/>
+                <a16:creationId xmlns="" xmlns:a16="http://schemas.microsoft.com/office/drawing/2014/main" id="{E593F2A7-8AEE-3E6F-1CD2-3F3CA5699923}"/>
               </a:ext>
             </a:extLst>
           </p:cNvPr>
@@ -4694,7 +4694,7 @@
           <p:cNvPr id="14" name="Text 0">
             <a:extLst>
               <a:ext uri="{FF2B5EF4-FFF2-40B4-BE49-F238E27FC236}">
-                <a16:creationId xmlns:a16="http://schemas.microsoft.com/office/drawing/2014/main" id="{3BB6AD06-1FAD-E83C-8A0F-5E1DB2F28494}"/>
+                <a16:creationId xmlns="" xmlns:a16="http://schemas.microsoft.com/office/drawing/2014/main" id="{3BB6AD06-1FAD-E83C-8A0F-5E1DB2F28494}"/>
               </a:ext>
             </a:extLst>
           </p:cNvPr>
@@ -4755,7 +4755,7 @@
           <p:cNvPr id="16" name="Text 2">
             <a:extLst>
               <a:ext uri="{FF2B5EF4-FFF2-40B4-BE49-F238E27FC236}">
-                <a16:creationId xmlns:a16="http://schemas.microsoft.com/office/drawing/2014/main" id="{CA008A43-82F8-359E-FEB4-8F6DACD4D05D}"/>
+                <a16:creationId xmlns="" xmlns:a16="http://schemas.microsoft.com/office/drawing/2014/main" id="{CA008A43-82F8-359E-FEB4-8F6DACD4D05D}"/>
               </a:ext>
             </a:extLst>
           </p:cNvPr>
@@ -4799,7 +4799,7 @@
           <p:cNvPr id="18" name="Text 4">
             <a:extLst>
               <a:ext uri="{FF2B5EF4-FFF2-40B4-BE49-F238E27FC236}">
-                <a16:creationId xmlns:a16="http://schemas.microsoft.com/office/drawing/2014/main" id="{88E4F750-718E-D102-AEF8-2593A6462AAD}"/>
+                <a16:creationId xmlns="" xmlns:a16="http://schemas.microsoft.com/office/drawing/2014/main" id="{88E4F750-718E-D102-AEF8-2593A6462AAD}"/>
               </a:ext>
             </a:extLst>
           </p:cNvPr>
@@ -4870,7 +4870,7 @@
           <p:cNvPr id="20" name="Text 6">
             <a:extLst>
               <a:ext uri="{FF2B5EF4-FFF2-40B4-BE49-F238E27FC236}">
-                <a16:creationId xmlns:a16="http://schemas.microsoft.com/office/drawing/2014/main" id="{FA5E5E96-FE36-AEC1-EAF3-180A8F4F51AC}"/>
+                <a16:creationId xmlns="" xmlns:a16="http://schemas.microsoft.com/office/drawing/2014/main" id="{FA5E5E96-FE36-AEC1-EAF3-180A8F4F51AC}"/>
               </a:ext>
             </a:extLst>
           </p:cNvPr>
@@ -4913,7 +4913,7 @@
           <p:cNvPr id="3" name="圖片 2">
             <a:extLst>
               <a:ext uri="{FF2B5EF4-FFF2-40B4-BE49-F238E27FC236}">
-                <a16:creationId xmlns:a16="http://schemas.microsoft.com/office/drawing/2014/main" id="{635CA31A-FB77-422D-626A-2A2CF2CCF580}"/>
+                <a16:creationId xmlns="" xmlns:a16="http://schemas.microsoft.com/office/drawing/2014/main" id="{635CA31A-FB77-422D-626A-2A2CF2CCF580}"/>
               </a:ext>
             </a:extLst>
           </p:cNvPr>
@@ -5007,7 +5007,7 @@
           <p:cNvPr id="2" name="Text 0">
             <a:extLst>
               <a:ext uri="{FF2B5EF4-FFF2-40B4-BE49-F238E27FC236}">
-                <a16:creationId xmlns:a16="http://schemas.microsoft.com/office/drawing/2014/main" id="{FF282119-4EA9-A517-DBDB-E3E85B403388}"/>
+                <a16:creationId xmlns="" xmlns:a16="http://schemas.microsoft.com/office/drawing/2014/main" id="{FF282119-4EA9-A517-DBDB-E3E85B403388}"/>
               </a:ext>
             </a:extLst>
           </p:cNvPr>
@@ -5052,7 +5052,7 @@
           <p:cNvPr id="3" name="Text 1">
             <a:extLst>
               <a:ext uri="{FF2B5EF4-FFF2-40B4-BE49-F238E27FC236}">
-                <a16:creationId xmlns:a16="http://schemas.microsoft.com/office/drawing/2014/main" id="{193BF335-732B-06E6-28AD-60684F263D36}"/>
+                <a16:creationId xmlns="" xmlns:a16="http://schemas.microsoft.com/office/drawing/2014/main" id="{193BF335-732B-06E6-28AD-60684F263D36}"/>
               </a:ext>
             </a:extLst>
           </p:cNvPr>
@@ -5097,7 +5097,7 @@
           <p:cNvPr id="4" name="Text 2">
             <a:extLst>
               <a:ext uri="{FF2B5EF4-FFF2-40B4-BE49-F238E27FC236}">
-                <a16:creationId xmlns:a16="http://schemas.microsoft.com/office/drawing/2014/main" id="{CC12874B-9579-9660-A9EA-0418C27E7014}"/>
+                <a16:creationId xmlns="" xmlns:a16="http://schemas.microsoft.com/office/drawing/2014/main" id="{CC12874B-9579-9660-A9EA-0418C27E7014}"/>
               </a:ext>
             </a:extLst>
           </p:cNvPr>
@@ -5150,7 +5150,7 @@
           <p:cNvPr id="12" name="圖片 11">
             <a:extLst>
               <a:ext uri="{FF2B5EF4-FFF2-40B4-BE49-F238E27FC236}">
-                <a16:creationId xmlns:a16="http://schemas.microsoft.com/office/drawing/2014/main" id="{213555AF-4D65-7AFC-2214-CF047D6380C1}"/>
+                <a16:creationId xmlns="" xmlns:a16="http://schemas.microsoft.com/office/drawing/2014/main" id="{213555AF-4D65-7AFC-2214-CF047D6380C1}"/>
               </a:ext>
             </a:extLst>
           </p:cNvPr>
@@ -5180,7 +5180,7 @@
           <p:cNvPr id="14" name="圖片 13">
             <a:extLst>
               <a:ext uri="{FF2B5EF4-FFF2-40B4-BE49-F238E27FC236}">
-                <a16:creationId xmlns:a16="http://schemas.microsoft.com/office/drawing/2014/main" id="{46776221-BA84-4D2B-182B-2C953FB561A7}"/>
+                <a16:creationId xmlns="" xmlns:a16="http://schemas.microsoft.com/office/drawing/2014/main" id="{46776221-BA84-4D2B-182B-2C953FB561A7}"/>
               </a:ext>
             </a:extLst>
           </p:cNvPr>
@@ -5274,7 +5274,7 @@
           <p:cNvPr id="3" name="Text 0">
             <a:extLst>
               <a:ext uri="{FF2B5EF4-FFF2-40B4-BE49-F238E27FC236}">
-                <a16:creationId xmlns:a16="http://schemas.microsoft.com/office/drawing/2014/main" id="{A2FB9310-4B85-E2EC-BA0D-8C555808BCA1}"/>
+                <a16:creationId xmlns="" xmlns:a16="http://schemas.microsoft.com/office/drawing/2014/main" id="{A2FB9310-4B85-E2EC-BA0D-8C555808BCA1}"/>
               </a:ext>
             </a:extLst>
           </p:cNvPr>
@@ -5319,7 +5319,7 @@
           <p:cNvPr id="5" name="Text 2">
             <a:extLst>
               <a:ext uri="{FF2B5EF4-FFF2-40B4-BE49-F238E27FC236}">
-                <a16:creationId xmlns:a16="http://schemas.microsoft.com/office/drawing/2014/main" id="{648DA8B2-7BF2-2D26-5396-989491B30F15}"/>
+                <a16:creationId xmlns="" xmlns:a16="http://schemas.microsoft.com/office/drawing/2014/main" id="{648DA8B2-7BF2-2D26-5396-989491B30F15}"/>
               </a:ext>
             </a:extLst>
           </p:cNvPr>
@@ -5364,7 +5364,7 @@
           <p:cNvPr id="6" name="Text 3">
             <a:extLst>
               <a:ext uri="{FF2B5EF4-FFF2-40B4-BE49-F238E27FC236}">
-                <a16:creationId xmlns:a16="http://schemas.microsoft.com/office/drawing/2014/main" id="{B95CB391-9D5A-148C-C8B0-56E4F14A860F}"/>
+                <a16:creationId xmlns="" xmlns:a16="http://schemas.microsoft.com/office/drawing/2014/main" id="{B95CB391-9D5A-148C-C8B0-56E4F14A860F}"/>
               </a:ext>
             </a:extLst>
           </p:cNvPr>
@@ -5407,7 +5407,7 @@
           <p:cNvPr id="8" name="Text 5">
             <a:extLst>
               <a:ext uri="{FF2B5EF4-FFF2-40B4-BE49-F238E27FC236}">
-                <a16:creationId xmlns:a16="http://schemas.microsoft.com/office/drawing/2014/main" id="{074E5190-BE68-FDE7-D4A0-DCD24C488AE1}"/>
+                <a16:creationId xmlns="" xmlns:a16="http://schemas.microsoft.com/office/drawing/2014/main" id="{074E5190-BE68-FDE7-D4A0-DCD24C488AE1}"/>
               </a:ext>
             </a:extLst>
           </p:cNvPr>
@@ -5452,7 +5452,7 @@
           <p:cNvPr id="9" name="Text 6">
             <a:extLst>
               <a:ext uri="{FF2B5EF4-FFF2-40B4-BE49-F238E27FC236}">
-                <a16:creationId xmlns:a16="http://schemas.microsoft.com/office/drawing/2014/main" id="{2FFF72BB-F1B7-B254-8443-418CD9DEB1B8}"/>
+                <a16:creationId xmlns="" xmlns:a16="http://schemas.microsoft.com/office/drawing/2014/main" id="{2FFF72BB-F1B7-B254-8443-418CD9DEB1B8}"/>
               </a:ext>
             </a:extLst>
           </p:cNvPr>
@@ -5497,7 +5497,7 @@
           <p:cNvPr id="11" name="Text 8">
             <a:extLst>
               <a:ext uri="{FF2B5EF4-FFF2-40B4-BE49-F238E27FC236}">
-                <a16:creationId xmlns:a16="http://schemas.microsoft.com/office/drawing/2014/main" id="{14EA59F5-94EC-671B-BA64-C9589F1B13C9}"/>
+                <a16:creationId xmlns="" xmlns:a16="http://schemas.microsoft.com/office/drawing/2014/main" id="{14EA59F5-94EC-671B-BA64-C9589F1B13C9}"/>
               </a:ext>
             </a:extLst>
           </p:cNvPr>
@@ -5542,7 +5542,7 @@
           <p:cNvPr id="12" name="Text 9">
             <a:extLst>
               <a:ext uri="{FF2B5EF4-FFF2-40B4-BE49-F238E27FC236}">
-                <a16:creationId xmlns:a16="http://schemas.microsoft.com/office/drawing/2014/main" id="{A05DA9B1-DE03-EB76-D4AD-0087996F857A}"/>
+                <a16:creationId xmlns="" xmlns:a16="http://schemas.microsoft.com/office/drawing/2014/main" id="{A05DA9B1-DE03-EB76-D4AD-0087996F857A}"/>
               </a:ext>
             </a:extLst>
           </p:cNvPr>
@@ -5587,7 +5587,7 @@
           <p:cNvPr id="16" name="圖片 15">
             <a:extLst>
               <a:ext uri="{FF2B5EF4-FFF2-40B4-BE49-F238E27FC236}">
-                <a16:creationId xmlns:a16="http://schemas.microsoft.com/office/drawing/2014/main" id="{2726CE08-A13E-4BC1-EB98-B377DB1F2D38}"/>
+                <a16:creationId xmlns="" xmlns:a16="http://schemas.microsoft.com/office/drawing/2014/main" id="{2726CE08-A13E-4BC1-EB98-B377DB1F2D38}"/>
               </a:ext>
             </a:extLst>
           </p:cNvPr>
@@ -5681,7 +5681,7 @@
           <p:cNvPr id="3" name="Text 0">
             <a:extLst>
               <a:ext uri="{FF2B5EF4-FFF2-40B4-BE49-F238E27FC236}">
-                <a16:creationId xmlns:a16="http://schemas.microsoft.com/office/drawing/2014/main" id="{8A25FD04-881C-3EC3-752C-F41973696412}"/>
+                <a16:creationId xmlns="" xmlns:a16="http://schemas.microsoft.com/office/drawing/2014/main" id="{8A25FD04-881C-3EC3-752C-F41973696412}"/>
               </a:ext>
             </a:extLst>
           </p:cNvPr>
@@ -5726,7 +5726,7 @@
           <p:cNvPr id="5" name="Text 2">
             <a:extLst>
               <a:ext uri="{FF2B5EF4-FFF2-40B4-BE49-F238E27FC236}">
-                <a16:creationId xmlns:a16="http://schemas.microsoft.com/office/drawing/2014/main" id="{D378F7F5-789B-2AF5-0F61-F8E4EC130904}"/>
+                <a16:creationId xmlns="" xmlns:a16="http://schemas.microsoft.com/office/drawing/2014/main" id="{D378F7F5-789B-2AF5-0F61-F8E4EC130904}"/>
               </a:ext>
             </a:extLst>
           </p:cNvPr>
@@ -5771,7 +5771,7 @@
           <p:cNvPr id="6" name="Text 3">
             <a:extLst>
               <a:ext uri="{FF2B5EF4-FFF2-40B4-BE49-F238E27FC236}">
-                <a16:creationId xmlns:a16="http://schemas.microsoft.com/office/drawing/2014/main" id="{93B8F347-6623-DEB1-0AC6-0F75889CC9EA}"/>
+                <a16:creationId xmlns="" xmlns:a16="http://schemas.microsoft.com/office/drawing/2014/main" id="{93B8F347-6623-DEB1-0AC6-0F75889CC9EA}"/>
               </a:ext>
             </a:extLst>
           </p:cNvPr>
@@ -5816,7 +5816,7 @@
           <p:cNvPr id="7" name="Text 4">
             <a:extLst>
               <a:ext uri="{FF2B5EF4-FFF2-40B4-BE49-F238E27FC236}">
-                <a16:creationId xmlns:a16="http://schemas.microsoft.com/office/drawing/2014/main" id="{B39BACA9-D0BB-DFEA-0D21-CA26FA0C691B}"/>
+                <a16:creationId xmlns="" xmlns:a16="http://schemas.microsoft.com/office/drawing/2014/main" id="{B39BACA9-D0BB-DFEA-0D21-CA26FA0C691B}"/>
               </a:ext>
             </a:extLst>
           </p:cNvPr>
@@ -5861,7 +5861,7 @@
           <p:cNvPr id="17" name="圖片 16">
             <a:extLst>
               <a:ext uri="{FF2B5EF4-FFF2-40B4-BE49-F238E27FC236}">
-                <a16:creationId xmlns:a16="http://schemas.microsoft.com/office/drawing/2014/main" id="{C35EDF63-141E-87D5-5A28-F52B8647EB9F}"/>
+                <a16:creationId xmlns="" xmlns:a16="http://schemas.microsoft.com/office/drawing/2014/main" id="{C35EDF63-141E-87D5-5A28-F52B8647EB9F}"/>
               </a:ext>
             </a:extLst>
           </p:cNvPr>
@@ -5955,7 +5955,7 @@
           <p:cNvPr id="3" name="Text 0">
             <a:extLst>
               <a:ext uri="{FF2B5EF4-FFF2-40B4-BE49-F238E27FC236}">
-                <a16:creationId xmlns:a16="http://schemas.microsoft.com/office/drawing/2014/main" id="{8A25FD04-881C-3EC3-752C-F41973696412}"/>
+                <a16:creationId xmlns="" xmlns:a16="http://schemas.microsoft.com/office/drawing/2014/main" id="{8A25FD04-881C-3EC3-752C-F41973696412}"/>
               </a:ext>
             </a:extLst>
           </p:cNvPr>
@@ -6072,7 +6072,7 @@
           <p:cNvPr id="2" name="Text 0">
             <a:extLst>
               <a:ext uri="{FF2B5EF4-FFF2-40B4-BE49-F238E27FC236}">
-                <a16:creationId xmlns:a16="http://schemas.microsoft.com/office/drawing/2014/main" id="{43051339-9B16-F8D1-2B54-6670F65E19EA}"/>
+                <a16:creationId xmlns="" xmlns:a16="http://schemas.microsoft.com/office/drawing/2014/main" id="{43051339-9B16-F8D1-2B54-6670F65E19EA}"/>
               </a:ext>
             </a:extLst>
           </p:cNvPr>
@@ -6117,7 +6117,7 @@
           <p:cNvPr id="3" name="Text 1">
             <a:extLst>
               <a:ext uri="{FF2B5EF4-FFF2-40B4-BE49-F238E27FC236}">
-                <a16:creationId xmlns:a16="http://schemas.microsoft.com/office/drawing/2014/main" id="{0C2EA2AC-9720-E7D0-2018-95BCB5B020ED}"/>
+                <a16:creationId xmlns="" xmlns:a16="http://schemas.microsoft.com/office/drawing/2014/main" id="{0C2EA2AC-9720-E7D0-2018-95BCB5B020ED}"/>
               </a:ext>
             </a:extLst>
           </p:cNvPr>
@@ -6177,7 +6177,7 @@
           <p:cNvPr id="4" name="Text 2">
             <a:extLst>
               <a:ext uri="{FF2B5EF4-FFF2-40B4-BE49-F238E27FC236}">
-                <a16:creationId xmlns:a16="http://schemas.microsoft.com/office/drawing/2014/main" id="{32CC4251-045F-A735-674C-7674D5575551}"/>
+                <a16:creationId xmlns="" xmlns:a16="http://schemas.microsoft.com/office/drawing/2014/main" id="{32CC4251-045F-A735-674C-7674D5575551}"/>
               </a:ext>
             </a:extLst>
           </p:cNvPr>
@@ -6225,7 +6225,7 @@
           <p:cNvPr id="5" name="Text 1">
             <a:extLst>
               <a:ext uri="{FF2B5EF4-FFF2-40B4-BE49-F238E27FC236}">
-                <a16:creationId xmlns:a16="http://schemas.microsoft.com/office/drawing/2014/main" id="{0C2EA2AC-9720-E7D0-2018-95BCB5B020ED}"/>
+                <a16:creationId xmlns="" xmlns:a16="http://schemas.microsoft.com/office/drawing/2014/main" id="{0C2EA2AC-9720-E7D0-2018-95BCB5B020ED}"/>
               </a:ext>
             </a:extLst>
           </p:cNvPr>
@@ -6273,7 +6273,7 @@
           <p:cNvPr id="6" name="Text 2">
             <a:extLst>
               <a:ext uri="{FF2B5EF4-FFF2-40B4-BE49-F238E27FC236}">
-                <a16:creationId xmlns:a16="http://schemas.microsoft.com/office/drawing/2014/main" id="{32CC4251-045F-A735-674C-7674D5575551}"/>
+                <a16:creationId xmlns="" xmlns:a16="http://schemas.microsoft.com/office/drawing/2014/main" id="{32CC4251-045F-A735-674C-7674D5575551}"/>
               </a:ext>
             </a:extLst>
           </p:cNvPr>
@@ -6321,7 +6321,7 @@
           <p:cNvPr id="9" name="Text 1">
             <a:extLst>
               <a:ext uri="{FF2B5EF4-FFF2-40B4-BE49-F238E27FC236}">
-                <a16:creationId xmlns:a16="http://schemas.microsoft.com/office/drawing/2014/main" id="{0C2EA2AC-9720-E7D0-2018-95BCB5B020ED}"/>
+                <a16:creationId xmlns="" xmlns:a16="http://schemas.microsoft.com/office/drawing/2014/main" id="{0C2EA2AC-9720-E7D0-2018-95BCB5B020ED}"/>
               </a:ext>
             </a:extLst>
           </p:cNvPr>
@@ -6354,7 +6354,15 @@
                 <a:ea typeface="Cabin" pitchFamily="34" charset="-122"/>
                 <a:cs typeface="Cabin" pitchFamily="34" charset="-120"/>
               </a:rPr>
-              <a:t>實作完整購物流程台</a:t>
+              <a:t>實作完整購物</a:t>
+            </a:r>
+            <a:r>
+              <a:rPr lang="zh-TW" altLang="en-US" sz="2400" dirty="0" smtClean="0">
+                <a:latin typeface="Cabin" pitchFamily="34" charset="0"/>
+                <a:ea typeface="Cabin" pitchFamily="34" charset="-122"/>
+                <a:cs typeface="Cabin" pitchFamily="34" charset="-120"/>
+              </a:rPr>
+              <a:t>流程</a:t>
             </a:r>
             <a:endParaRPr lang="en-US" sz="2200" dirty="0"/>
           </a:p>
@@ -6365,7 +6373,7 @@
           <p:cNvPr id="10" name="Text 2">
             <a:extLst>
               <a:ext uri="{FF2B5EF4-FFF2-40B4-BE49-F238E27FC236}">
-                <a16:creationId xmlns:a16="http://schemas.microsoft.com/office/drawing/2014/main" id="{32CC4251-045F-A735-674C-7674D5575551}"/>
+                <a16:creationId xmlns="" xmlns:a16="http://schemas.microsoft.com/office/drawing/2014/main" id="{32CC4251-045F-A735-674C-7674D5575551}"/>
               </a:ext>
             </a:extLst>
           </p:cNvPr>
@@ -6477,7 +6485,7 @@
           <p:cNvPr id="2" name="Text 0">
             <a:extLst>
               <a:ext uri="{FF2B5EF4-FFF2-40B4-BE49-F238E27FC236}">
-                <a16:creationId xmlns:a16="http://schemas.microsoft.com/office/drawing/2014/main" id="{D86F5ABA-0B58-8CD4-CC56-B5665FB81ADD}"/>
+                <a16:creationId xmlns="" xmlns:a16="http://schemas.microsoft.com/office/drawing/2014/main" id="{D86F5ABA-0B58-8CD4-CC56-B5665FB81ADD}"/>
               </a:ext>
             </a:extLst>
           </p:cNvPr>
@@ -6522,7 +6530,7 @@
           <p:cNvPr id="7" name="Text 5">
             <a:extLst>
               <a:ext uri="{FF2B5EF4-FFF2-40B4-BE49-F238E27FC236}">
-                <a16:creationId xmlns:a16="http://schemas.microsoft.com/office/drawing/2014/main" id="{86BEF0FC-6390-1497-F4EC-574402A2FE09}"/>
+                <a16:creationId xmlns="" xmlns:a16="http://schemas.microsoft.com/office/drawing/2014/main" id="{86BEF0FC-6390-1497-F4EC-574402A2FE09}"/>
               </a:ext>
             </a:extLst>
           </p:cNvPr>
@@ -6567,7 +6575,7 @@
           <p:cNvPr id="8" name="Text 6">
             <a:extLst>
               <a:ext uri="{FF2B5EF4-FFF2-40B4-BE49-F238E27FC236}">
-                <a16:creationId xmlns:a16="http://schemas.microsoft.com/office/drawing/2014/main" id="{80252D43-CF65-35D9-E01C-9E4F536F7CC7}"/>
+                <a16:creationId xmlns="" xmlns:a16="http://schemas.microsoft.com/office/drawing/2014/main" id="{80252D43-CF65-35D9-E01C-9E4F536F7CC7}"/>
               </a:ext>
             </a:extLst>
           </p:cNvPr>
@@ -6576,7 +6584,7 @@
         </p:nvSpPr>
         <p:spPr>
           <a:xfrm>
-            <a:off x="5907147" y="4030992"/>
+            <a:off x="5828364" y="4030992"/>
             <a:ext cx="6185535" cy="383024"/>
           </a:xfrm>
           <a:prstGeom prst="rect">
@@ -6613,7 +6621,7 @@
           <p:cNvPr id="10" name="Text 8">
             <a:extLst>
               <a:ext uri="{FF2B5EF4-FFF2-40B4-BE49-F238E27FC236}">
-                <a16:creationId xmlns:a16="http://schemas.microsoft.com/office/drawing/2014/main" id="{D611A246-5FF8-10E3-B3D6-9B1DA498610E}"/>
+                <a16:creationId xmlns="" xmlns:a16="http://schemas.microsoft.com/office/drawing/2014/main" id="{D611A246-5FF8-10E3-B3D6-9B1DA498610E}"/>
               </a:ext>
             </a:extLst>
           </p:cNvPr>
@@ -6622,7 +6630,7 @@
         </p:nvSpPr>
         <p:spPr>
           <a:xfrm>
-            <a:off x="5907147" y="4564627"/>
+            <a:off x="5828365" y="5115376"/>
             <a:ext cx="6185535" cy="383024"/>
           </a:xfrm>
           <a:prstGeom prst="rect">
@@ -6667,7 +6675,7 @@
           <p:cNvPr id="11" name="Text 8">
             <a:extLst>
               <a:ext uri="{FF2B5EF4-FFF2-40B4-BE49-F238E27FC236}">
-                <a16:creationId xmlns:a16="http://schemas.microsoft.com/office/drawing/2014/main" id="{00062358-1EDA-B75A-D993-678F1ABC08F9}"/>
+                <a16:creationId xmlns="" xmlns:a16="http://schemas.microsoft.com/office/drawing/2014/main" id="{00062358-1EDA-B75A-D993-678F1ABC08F9}"/>
               </a:ext>
             </a:extLst>
           </p:cNvPr>
@@ -6676,7 +6684,7 @@
         </p:nvSpPr>
         <p:spPr>
           <a:xfrm>
-            <a:off x="5907146" y="5604533"/>
+            <a:off x="5828366" y="4573184"/>
             <a:ext cx="6185535" cy="383024"/>
           </a:xfrm>
           <a:prstGeom prst="rect">
@@ -6711,60 +6719,6 @@
                 <a:cs typeface="Cabin" pitchFamily="34" charset="-120"/>
               </a:rPr>
               <a:t>系統</a:t>
-            </a:r>
-            <a:endParaRPr lang="en-US" sz="1850" dirty="0"/>
-          </a:p>
-        </p:txBody>
-      </p:sp>
-      <p:sp>
-        <p:nvSpPr>
-          <p:cNvPr id="12" name="Text 8">
-            <a:extLst>
-              <a:ext uri="{FF2B5EF4-FFF2-40B4-BE49-F238E27FC236}">
-                <a16:creationId xmlns:a16="http://schemas.microsoft.com/office/drawing/2014/main" id="{53AA341C-D24A-D785-800B-656C55B37B2D}"/>
-              </a:ext>
-            </a:extLst>
-          </p:cNvPr>
-          <p:cNvSpPr/>
-          <p:nvPr/>
-        </p:nvSpPr>
-        <p:spPr>
-          <a:xfrm>
-            <a:off x="5907146" y="5048806"/>
-            <a:ext cx="6185535" cy="383024"/>
-          </a:xfrm>
-          <a:prstGeom prst="rect">
-            <a:avLst/>
-          </a:prstGeom>
-          <a:noFill/>
-          <a:ln/>
-        </p:spPr>
-        <p:txBody>
-          <a:bodyPr wrap="none" lIns="0" tIns="0" rIns="0" bIns="0" rtlCol="0" anchor="t"/>
-          <a:lstStyle/>
-          <a:p>
-            <a:pPr marL="342900" indent="-342900" algn="l">
-              <a:lnSpc>
-                <a:spcPts val="3000"/>
-              </a:lnSpc>
-              <a:buSzPct val="100000"/>
-              <a:buChar char="•"/>
-            </a:pPr>
-            <a:r>
-              <a:rPr lang="zh-TW" altLang="en-US" sz="1850" dirty="0">
-                <a:latin typeface="Cabin" pitchFamily="34" charset="0"/>
-                <a:ea typeface="Cabin" pitchFamily="34" charset="-122"/>
-                <a:cs typeface="Cabin" pitchFamily="34" charset="-120"/>
-              </a:rPr>
-              <a:t>完善訂單</a:t>
-            </a:r>
-            <a:r>
-              <a:rPr lang="en-US" altLang="zh-TW" sz="1850" dirty="0" err="1">
-                <a:latin typeface="Cabin" pitchFamily="34" charset="0"/>
-                <a:ea typeface="Cabin" pitchFamily="34" charset="-122"/>
-                <a:cs typeface="Cabin" pitchFamily="34" charset="-120"/>
-              </a:rPr>
-              <a:t>物流系統</a:t>
             </a:r>
             <a:endParaRPr lang="en-US" sz="1850" dirty="0"/>
           </a:p>
@@ -6839,7 +6793,7 @@
           <p:cNvPr id="2" name="Text 0">
             <a:extLst>
               <a:ext uri="{FF2B5EF4-FFF2-40B4-BE49-F238E27FC236}">
-                <a16:creationId xmlns:a16="http://schemas.microsoft.com/office/drawing/2014/main" id="{D86F5ABA-0B58-8CD4-CC56-B5665FB81ADD}"/>
+                <a16:creationId xmlns="" xmlns:a16="http://schemas.microsoft.com/office/drawing/2014/main" id="{D86F5ABA-0B58-8CD4-CC56-B5665FB81ADD}"/>
               </a:ext>
             </a:extLst>
           </p:cNvPr>
@@ -6848,7 +6802,7 @@
         </p:nvSpPr>
         <p:spPr>
           <a:xfrm>
-            <a:off x="6423276" y="1942552"/>
+            <a:off x="6373581" y="1574804"/>
             <a:ext cx="5632490" cy="704017"/>
           </a:xfrm>
           <a:prstGeom prst="rect">
@@ -6883,7 +6837,7 @@
           <p:cNvPr id="3" name="Text 1">
             <a:extLst>
               <a:ext uri="{FF2B5EF4-FFF2-40B4-BE49-F238E27FC236}">
-                <a16:creationId xmlns:a16="http://schemas.microsoft.com/office/drawing/2014/main" id="{E8FEE2E1-1E85-EEEE-7325-2D108C73AF3D}"/>
+                <a16:creationId xmlns="" xmlns:a16="http://schemas.microsoft.com/office/drawing/2014/main" id="{E8FEE2E1-1E85-EEEE-7325-2D108C73AF3D}"/>
               </a:ext>
             </a:extLst>
           </p:cNvPr>
@@ -6930,7 +6884,7 @@
           <p:cNvPr id="4" name="Text 2">
             <a:extLst>
               <a:ext uri="{FF2B5EF4-FFF2-40B4-BE49-F238E27FC236}">
-                <a16:creationId xmlns:a16="http://schemas.microsoft.com/office/drawing/2014/main" id="{71C51FCE-3E66-78F1-6A11-6A5C36BF09F3}"/>
+                <a16:creationId xmlns="" xmlns:a16="http://schemas.microsoft.com/office/drawing/2014/main" id="{71C51FCE-3E66-78F1-6A11-6A5C36BF09F3}"/>
               </a:ext>
             </a:extLst>
           </p:cNvPr>
@@ -6971,7 +6925,7 @@
           <p:cNvPr id="7" name="Text 5">
             <a:extLst>
               <a:ext uri="{FF2B5EF4-FFF2-40B4-BE49-F238E27FC236}">
-                <a16:creationId xmlns:a16="http://schemas.microsoft.com/office/drawing/2014/main" id="{86BEF0FC-6390-1497-F4EC-574402A2FE09}"/>
+                <a16:creationId xmlns="" xmlns:a16="http://schemas.microsoft.com/office/drawing/2014/main" id="{86BEF0FC-6390-1497-F4EC-574402A2FE09}"/>
               </a:ext>
             </a:extLst>
           </p:cNvPr>
@@ -6980,7 +6934,7 @@
         </p:nvSpPr>
         <p:spPr>
           <a:xfrm>
-            <a:off x="7614761" y="3770233"/>
+            <a:off x="8976422" y="4180312"/>
             <a:ext cx="2816185" cy="351949"/>
           </a:xfrm>
           <a:prstGeom prst="rect">
@@ -7022,7 +6976,7 @@
           <p:cNvPr id="13" name="圖片 12" descr="一張含有 樣式, 像素, 設計 的圖片&#10;&#10;AI 產生的內容可能不正確。">
             <a:extLst>
               <a:ext uri="{FF2B5EF4-FFF2-40B4-BE49-F238E27FC236}">
-                <a16:creationId xmlns:a16="http://schemas.microsoft.com/office/drawing/2014/main" id="{3D2B7422-627D-DE79-40B7-725C9977D2F9}"/>
+                <a16:creationId xmlns="" xmlns:a16="http://schemas.microsoft.com/office/drawing/2014/main" id="{3D2B7422-627D-DE79-40B7-725C9977D2F9}"/>
               </a:ext>
             </a:extLst>
           </p:cNvPr>
@@ -7053,6 +7007,51 @@
           </a:prstGeom>
         </p:spPr>
       </p:pic>
+      <p:sp>
+        <p:nvSpPr>
+          <p:cNvPr id="8" name="Text 5">
+            <a:extLst>
+              <a:ext uri="{FF2B5EF4-FFF2-40B4-BE49-F238E27FC236}">
+                <a16:creationId xmlns="" xmlns:a16="http://schemas.microsoft.com/office/drawing/2014/main" id="{86BEF0FC-6390-1497-F4EC-574402A2FE09}"/>
+              </a:ext>
+            </a:extLst>
+          </p:cNvPr>
+          <p:cNvSpPr/>
+          <p:nvPr/>
+        </p:nvSpPr>
+        <p:spPr>
+          <a:xfrm>
+            <a:off x="6373581" y="2453692"/>
+            <a:ext cx="2816185" cy="351949"/>
+          </a:xfrm>
+          <a:prstGeom prst="rect">
+            <a:avLst/>
+          </a:prstGeom>
+          <a:noFill/>
+          <a:ln/>
+        </p:spPr>
+        <p:txBody>
+          <a:bodyPr wrap="none" lIns="0" tIns="0" rIns="0" bIns="0" rtlCol="0" anchor="t"/>
+          <a:lstStyle/>
+          <a:p>
+            <a:pPr marL="0" indent="0" algn="l">
+              <a:lnSpc>
+                <a:spcPts val="2750"/>
+              </a:lnSpc>
+              <a:buNone/>
+            </a:pPr>
+            <a:r>
+              <a:rPr lang="zh-TW" altLang="en-US" sz="2200" dirty="0" smtClean="0">
+                <a:latin typeface="Unbounded" pitchFamily="34" charset="0"/>
+                <a:ea typeface="Unbounded" pitchFamily="34" charset="-122"/>
+                <a:cs typeface="Unbounded" pitchFamily="34" charset="-120"/>
+              </a:rPr>
+              <a:t>謝謝大家</a:t>
+            </a:r>
+            <a:endParaRPr lang="en-US" sz="2200" dirty="0"/>
+          </a:p>
+        </p:txBody>
+      </p:sp>
     </p:spTree>
     <p:extLst>
       <p:ext uri="{BB962C8B-B14F-4D97-AF65-F5344CB8AC3E}">
@@ -7122,7 +7121,7 @@
           <p:cNvPr id="2" name="Text 0">
             <a:extLst>
               <a:ext uri="{FF2B5EF4-FFF2-40B4-BE49-F238E27FC236}">
-                <a16:creationId xmlns:a16="http://schemas.microsoft.com/office/drawing/2014/main" id="{0E5DFD86-DAA3-E24E-C115-87E2A3946D9F}"/>
+                <a16:creationId xmlns="" xmlns:a16="http://schemas.microsoft.com/office/drawing/2014/main" id="{0E5DFD86-DAA3-E24E-C115-87E2A3946D9F}"/>
               </a:ext>
             </a:extLst>
           </p:cNvPr>
@@ -7175,7 +7174,7 @@
           <p:cNvPr id="10" name="圖片 9">
             <a:extLst>
               <a:ext uri="{FF2B5EF4-FFF2-40B4-BE49-F238E27FC236}">
-                <a16:creationId xmlns:a16="http://schemas.microsoft.com/office/drawing/2014/main" id="{1738B777-4BE8-5A15-7E45-7CA89239BC17}"/>
+                <a16:creationId xmlns="" xmlns:a16="http://schemas.microsoft.com/office/drawing/2014/main" id="{1738B777-4BE8-5A15-7E45-7CA89239BC17}"/>
               </a:ext>
             </a:extLst>
           </p:cNvPr>
@@ -7269,7 +7268,7 @@
           <p:cNvPr id="2" name="Text 0">
             <a:extLst>
               <a:ext uri="{FF2B5EF4-FFF2-40B4-BE49-F238E27FC236}">
-                <a16:creationId xmlns:a16="http://schemas.microsoft.com/office/drawing/2014/main" id="{C052DEC4-A2C2-F364-8F62-8A1C4A59A339}"/>
+                <a16:creationId xmlns="" xmlns:a16="http://schemas.microsoft.com/office/drawing/2014/main" id="{C052DEC4-A2C2-F364-8F62-8A1C4A59A339}"/>
               </a:ext>
             </a:extLst>
           </p:cNvPr>
@@ -7312,7 +7311,7 @@
           <p:cNvPr id="6" name="圖片 5">
             <a:extLst>
               <a:ext uri="{FF2B5EF4-FFF2-40B4-BE49-F238E27FC236}">
-                <a16:creationId xmlns:a16="http://schemas.microsoft.com/office/drawing/2014/main" id="{8FDB7BB5-A92A-EB1A-5A41-B21CCD9266FB}"/>
+                <a16:creationId xmlns="" xmlns:a16="http://schemas.microsoft.com/office/drawing/2014/main" id="{8FDB7BB5-A92A-EB1A-5A41-B21CCD9266FB}"/>
               </a:ext>
             </a:extLst>
           </p:cNvPr>
@@ -7406,7 +7405,7 @@
           <p:cNvPr id="2" name="Text 0">
             <a:extLst>
               <a:ext uri="{FF2B5EF4-FFF2-40B4-BE49-F238E27FC236}">
-                <a16:creationId xmlns:a16="http://schemas.microsoft.com/office/drawing/2014/main" id="{C052DEC4-A2C2-F364-8F62-8A1C4A59A339}"/>
+                <a16:creationId xmlns="" xmlns:a16="http://schemas.microsoft.com/office/drawing/2014/main" id="{C052DEC4-A2C2-F364-8F62-8A1C4A59A339}"/>
               </a:ext>
             </a:extLst>
           </p:cNvPr>
@@ -7449,7 +7448,7 @@
           <p:cNvPr id="4" name="圖片 3">
             <a:extLst>
               <a:ext uri="{FF2B5EF4-FFF2-40B4-BE49-F238E27FC236}">
-                <a16:creationId xmlns:a16="http://schemas.microsoft.com/office/drawing/2014/main" id="{52D44C58-BB4B-F748-56AF-7867D1FC7FF0}"/>
+                <a16:creationId xmlns="" xmlns:a16="http://schemas.microsoft.com/office/drawing/2014/main" id="{52D44C58-BB4B-F748-56AF-7867D1FC7FF0}"/>
               </a:ext>
             </a:extLst>
           </p:cNvPr>
@@ -7543,7 +7542,7 @@
           <p:cNvPr id="2" name="Text 0">
             <a:extLst>
               <a:ext uri="{FF2B5EF4-FFF2-40B4-BE49-F238E27FC236}">
-                <a16:creationId xmlns:a16="http://schemas.microsoft.com/office/drawing/2014/main" id="{A7F0C4F0-0F36-4ABB-1894-BDD61C4F5D4E}"/>
+                <a16:creationId xmlns="" xmlns:a16="http://schemas.microsoft.com/office/drawing/2014/main" id="{A7F0C4F0-0F36-4ABB-1894-BDD61C4F5D4E}"/>
               </a:ext>
             </a:extLst>
           </p:cNvPr>
@@ -7600,7 +7599,7 @@
           <p:cNvPr id="4" name="圖片 3">
             <a:extLst>
               <a:ext uri="{FF2B5EF4-FFF2-40B4-BE49-F238E27FC236}">
-                <a16:creationId xmlns:a16="http://schemas.microsoft.com/office/drawing/2014/main" id="{038016DF-3035-26A4-BDF0-6A56BDE25C10}"/>
+                <a16:creationId xmlns="" xmlns:a16="http://schemas.microsoft.com/office/drawing/2014/main" id="{038016DF-3035-26A4-BDF0-6A56BDE25C10}"/>
               </a:ext>
             </a:extLst>
           </p:cNvPr>
@@ -7694,7 +7693,7 @@
           <p:cNvPr id="3" name="Text 0">
             <a:extLst>
               <a:ext uri="{FF2B5EF4-FFF2-40B4-BE49-F238E27FC236}">
-                <a16:creationId xmlns:a16="http://schemas.microsoft.com/office/drawing/2014/main" id="{5C17D3ED-A85C-614C-6F5F-0F8B4B8933E8}"/>
+                <a16:creationId xmlns="" xmlns:a16="http://schemas.microsoft.com/office/drawing/2014/main" id="{5C17D3ED-A85C-614C-6F5F-0F8B4B8933E8}"/>
               </a:ext>
             </a:extLst>
           </p:cNvPr>
@@ -7739,7 +7738,7 @@
           <p:cNvPr id="5" name="Text 2">
             <a:extLst>
               <a:ext uri="{FF2B5EF4-FFF2-40B4-BE49-F238E27FC236}">
-                <a16:creationId xmlns:a16="http://schemas.microsoft.com/office/drawing/2014/main" id="{525A2525-6238-2A2C-F363-D7B41FF84E72}"/>
+                <a16:creationId xmlns="" xmlns:a16="http://schemas.microsoft.com/office/drawing/2014/main" id="{525A2525-6238-2A2C-F363-D7B41FF84E72}"/>
               </a:ext>
             </a:extLst>
           </p:cNvPr>
@@ -7779,67 +7778,12 @@
           </a:p>
         </p:txBody>
       </p:sp>
-      <p:sp>
-        <p:nvSpPr>
-          <p:cNvPr id="6" name="Text 3">
-            <a:extLst>
-              <a:ext uri="{FF2B5EF4-FFF2-40B4-BE49-F238E27FC236}">
-                <a16:creationId xmlns:a16="http://schemas.microsoft.com/office/drawing/2014/main" id="{003E8AB1-B42E-162E-6AAE-453861A86BDA}"/>
-              </a:ext>
-            </a:extLst>
-          </p:cNvPr>
-          <p:cNvSpPr/>
-          <p:nvPr/>
-        </p:nvSpPr>
-        <p:spPr>
-          <a:xfrm>
-            <a:off x="9468569" y="3384209"/>
-            <a:ext cx="2806898" cy="766048"/>
-          </a:xfrm>
-          <a:prstGeom prst="rect">
-            <a:avLst/>
-          </a:prstGeom>
-          <a:noFill/>
-          <a:ln/>
-        </p:spPr>
-        <p:txBody>
-          <a:bodyPr wrap="square" lIns="0" tIns="0" rIns="0" bIns="0" rtlCol="0" anchor="t"/>
-          <a:lstStyle/>
-          <a:p>
-            <a:pPr marL="0" indent="0" algn="l">
-              <a:lnSpc>
-                <a:spcPts val="3000"/>
-              </a:lnSpc>
-              <a:buNone/>
-            </a:pPr>
-            <a:r>
-              <a:rPr lang="zh-TW" altLang="en-US" sz="1850" dirty="0">
-                <a:latin typeface="Cabin" pitchFamily="34" charset="0"/>
-              </a:rPr>
-              <a:t>密碼用</a:t>
-            </a:r>
-            <a:r>
-              <a:rPr lang="en-US" altLang="zh-TW" sz="1850" dirty="0" err="1">
-                <a:latin typeface="Cabin" pitchFamily="34" charset="0"/>
-              </a:rPr>
-              <a:t>Bcrypty</a:t>
-            </a:r>
-            <a:r>
-              <a:rPr lang="zh-TW" altLang="en-US" sz="1850" dirty="0">
-                <a:latin typeface="Cabin" pitchFamily="34" charset="0"/>
-              </a:rPr>
-              <a:t>加密</a:t>
-            </a:r>
-            <a:endParaRPr lang="en-US" sz="1850" dirty="0"/>
-          </a:p>
-        </p:txBody>
-      </p:sp>
       <p:pic>
         <p:nvPicPr>
           <p:cNvPr id="4" name="圖片 3">
             <a:extLst>
               <a:ext uri="{FF2B5EF4-FFF2-40B4-BE49-F238E27FC236}">
-                <a16:creationId xmlns:a16="http://schemas.microsoft.com/office/drawing/2014/main" id="{3BCF763E-BC1F-BFE4-C4F0-B09B51F38D49}"/>
+                <a16:creationId xmlns="" xmlns:a16="http://schemas.microsoft.com/office/drawing/2014/main" id="{3BCF763E-BC1F-BFE4-C4F0-B09B51F38D49}"/>
               </a:ext>
             </a:extLst>
           </p:cNvPr>
@@ -7869,7 +7813,7 @@
           <p:cNvPr id="10" name="圖片 9">
             <a:extLst>
               <a:ext uri="{FF2B5EF4-FFF2-40B4-BE49-F238E27FC236}">
-                <a16:creationId xmlns:a16="http://schemas.microsoft.com/office/drawing/2014/main" id="{9C70F7A0-09EC-2C46-537B-EA7C2B6526CC}"/>
+                <a16:creationId xmlns="" xmlns:a16="http://schemas.microsoft.com/office/drawing/2014/main" id="{9C70F7A0-09EC-2C46-537B-EA7C2B6526CC}"/>
               </a:ext>
             </a:extLst>
           </p:cNvPr>
@@ -7899,7 +7843,7 @@
           <p:cNvPr id="12" name="圖片 11">
             <a:extLst>
               <a:ext uri="{FF2B5EF4-FFF2-40B4-BE49-F238E27FC236}">
-                <a16:creationId xmlns:a16="http://schemas.microsoft.com/office/drawing/2014/main" id="{077F8FC3-DA54-4FCB-9EBE-E7D4968FED1D}"/>
+                <a16:creationId xmlns="" xmlns:a16="http://schemas.microsoft.com/office/drawing/2014/main" id="{077F8FC3-DA54-4FCB-9EBE-E7D4968FED1D}"/>
               </a:ext>
             </a:extLst>
           </p:cNvPr>
@@ -7929,7 +7873,7 @@
           <p:cNvPr id="16" name="Text 3">
             <a:extLst>
               <a:ext uri="{FF2B5EF4-FFF2-40B4-BE49-F238E27FC236}">
-                <a16:creationId xmlns:a16="http://schemas.microsoft.com/office/drawing/2014/main" id="{923ADE83-8192-88ED-F600-C9ED68EF6C17}"/>
+                <a16:creationId xmlns="" xmlns:a16="http://schemas.microsoft.com/office/drawing/2014/main" id="{923ADE83-8192-88ED-F600-C9ED68EF6C17}"/>
               </a:ext>
             </a:extLst>
           </p:cNvPr>
@@ -7939,7 +7883,7 @@
         <p:spPr>
           <a:xfrm>
             <a:off x="8065120" y="2839034"/>
-            <a:ext cx="2806898" cy="766048"/>
+            <a:ext cx="3245610" cy="766048"/>
           </a:xfrm>
           <a:prstGeom prst="rect">
             <a:avLst/>
@@ -7982,7 +7926,7 @@
           <p:cNvPr id="18" name="圖片 17">
             <a:extLst>
               <a:ext uri="{FF2B5EF4-FFF2-40B4-BE49-F238E27FC236}">
-                <a16:creationId xmlns:a16="http://schemas.microsoft.com/office/drawing/2014/main" id="{A0097178-2235-08B4-9A33-A967840EB1CD}"/>
+                <a16:creationId xmlns="" xmlns:a16="http://schemas.microsoft.com/office/drawing/2014/main" id="{A0097178-2235-08B4-9A33-A967840EB1CD}"/>
               </a:ext>
             </a:extLst>
           </p:cNvPr>
@@ -8076,7 +8020,7 @@
           <p:cNvPr id="3" name="Text 0">
             <a:extLst>
               <a:ext uri="{FF2B5EF4-FFF2-40B4-BE49-F238E27FC236}">
-                <a16:creationId xmlns:a16="http://schemas.microsoft.com/office/drawing/2014/main" id="{8BF2A6AB-1F7E-9633-389D-D723B15A9392}"/>
+                <a16:creationId xmlns="" xmlns:a16="http://schemas.microsoft.com/office/drawing/2014/main" id="{8BF2A6AB-1F7E-9633-389D-D723B15A9392}"/>
               </a:ext>
             </a:extLst>
           </p:cNvPr>
@@ -8121,7 +8065,7 @@
           <p:cNvPr id="5" name="Text 2">
             <a:extLst>
               <a:ext uri="{FF2B5EF4-FFF2-40B4-BE49-F238E27FC236}">
-                <a16:creationId xmlns:a16="http://schemas.microsoft.com/office/drawing/2014/main" id="{101A07B7-081B-4384-C963-FFC0D5B53663}"/>
+                <a16:creationId xmlns="" xmlns:a16="http://schemas.microsoft.com/office/drawing/2014/main" id="{101A07B7-081B-4384-C963-FFC0D5B53663}"/>
               </a:ext>
             </a:extLst>
           </p:cNvPr>
@@ -8166,7 +8110,7 @@
           <p:cNvPr id="6" name="Text 3">
             <a:extLst>
               <a:ext uri="{FF2B5EF4-FFF2-40B4-BE49-F238E27FC236}">
-                <a16:creationId xmlns:a16="http://schemas.microsoft.com/office/drawing/2014/main" id="{462400A2-D484-A8F3-CCF3-32E253FD6954}"/>
+                <a16:creationId xmlns="" xmlns:a16="http://schemas.microsoft.com/office/drawing/2014/main" id="{462400A2-D484-A8F3-CCF3-32E253FD6954}"/>
               </a:ext>
             </a:extLst>
           </p:cNvPr>
@@ -8211,7 +8155,7 @@
           <p:cNvPr id="4" name="圖片 3">
             <a:extLst>
               <a:ext uri="{FF2B5EF4-FFF2-40B4-BE49-F238E27FC236}">
-                <a16:creationId xmlns:a16="http://schemas.microsoft.com/office/drawing/2014/main" id="{7B6AE933-852E-EABA-48F8-CECC3C75810B}"/>
+                <a16:creationId xmlns="" xmlns:a16="http://schemas.microsoft.com/office/drawing/2014/main" id="{7B6AE933-852E-EABA-48F8-CECC3C75810B}"/>
               </a:ext>
             </a:extLst>
           </p:cNvPr>
@@ -8305,7 +8249,7 @@
           <p:cNvPr id="3" name="Text 0">
             <a:extLst>
               <a:ext uri="{FF2B5EF4-FFF2-40B4-BE49-F238E27FC236}">
-                <a16:creationId xmlns:a16="http://schemas.microsoft.com/office/drawing/2014/main" id="{8BF2A6AB-1F7E-9633-389D-D723B15A9392}"/>
+                <a16:creationId xmlns="" xmlns:a16="http://schemas.microsoft.com/office/drawing/2014/main" id="{8BF2A6AB-1F7E-9633-389D-D723B15A9392}"/>
               </a:ext>
             </a:extLst>
           </p:cNvPr>
@@ -8350,7 +8294,7 @@
           <p:cNvPr id="14" name="Text 5">
             <a:extLst>
               <a:ext uri="{FF2B5EF4-FFF2-40B4-BE49-F238E27FC236}">
-                <a16:creationId xmlns:a16="http://schemas.microsoft.com/office/drawing/2014/main" id="{F636048F-4C36-6D44-AA6F-5D21733034BE}"/>
+                <a16:creationId xmlns="" xmlns:a16="http://schemas.microsoft.com/office/drawing/2014/main" id="{F636048F-4C36-6D44-AA6F-5D21733034BE}"/>
               </a:ext>
             </a:extLst>
           </p:cNvPr>
@@ -8396,7 +8340,7 @@
           <p:cNvPr id="16" name="Text 6">
             <a:extLst>
               <a:ext uri="{FF2B5EF4-FFF2-40B4-BE49-F238E27FC236}">
-                <a16:creationId xmlns:a16="http://schemas.microsoft.com/office/drawing/2014/main" id="{6BBFCEEE-A067-D3FE-98EA-BF5239A138DB}"/>
+                <a16:creationId xmlns="" xmlns:a16="http://schemas.microsoft.com/office/drawing/2014/main" id="{6BBFCEEE-A067-D3FE-98EA-BF5239A138DB}"/>
               </a:ext>
             </a:extLst>
           </p:cNvPr>
